--- a/03_Poster/Poster.pptx
+++ b/03_Poster/Poster.pptx
@@ -105,6 +105,309 @@
     </a:lvl9pPr>
   </p:defaultTextStyle>
 </p:presentation>
+</file>
+
+<file path=ppt/charts/chart1.xml><?xml version="1.0" encoding="utf-8"?>
+<c:chartSpace xmlns:c="http://schemas.openxmlformats.org/drawingml/2006/chart" xmlns:a="http://schemas.openxmlformats.org/drawingml/2006/main" xmlns:r="http://schemas.openxmlformats.org/officeDocument/2006/relationships">
+  <c:date1904 val="0"/>
+  <c:roundedCorners val="1"/>
+  <c:chart>
+    <c:title>
+      <c:tx>
+        <c:rich>
+          <a:bodyPr/>
+          <a:lstStyle/>
+          <a:p>
+            <a:pPr>
+              <a:defRPr sz="2000" b="0" i="0" u="none" strike="noStrike">
+                <a:solidFill>
+                  <a:srgbClr val="52514E"/>
+                </a:solidFill>
+                <a:latin typeface="Arial"/>
+              </a:defRPr>
+            </a:pPr>
+            <a:r>
+              <a:rPr sz="2000" b="0" i="0" u="none" strike="noStrike">
+                <a:solidFill>
+                  <a:srgbClr val="52514E"/>
+                </a:solidFill>
+                <a:latin typeface="Arial"/>
+              </a:rPr>
+              <a:t>% Good runs, 6 hard instances</a:t>
+            </a:r>
+          </a:p>
+        </c:rich>
+      </c:tx>
+      <c:layout/>
+      <c:overlay val="0"/>
+    </c:title>
+    <c:autoTitleDeleted val="0"/>
+    <c:plotArea>
+      <c:layout/>
+      <c:barChart>
+        <c:barDir val="col"/>
+        <c:grouping val="clustered"/>
+        <c:varyColors val="0"/>
+        <c:ser>
+          <c:idx val="0"/>
+          <c:order val="0"/>
+          <c:tx>
+            <c:strRef>
+              <c:f>Sheet1!$B$1</c:f>
+              <c:strCache>
+                <c:ptCount val="1"/>
+                <c:pt idx="0">
+                  <c:v>%Good</c:v>
+                </c:pt>
+              </c:strCache>
+            </c:strRef>
+          </c:tx>
+          <c:spPr>
+            <a:solidFill>
+              <a:srgbClr val="EB6834"/>
+            </a:solidFill>
+            <a:effectLst/>
+          </c:spPr>
+          <c:invertIfNegative val="0"/>
+          <c:dLbls>
+            <c:numFmt formatCode="0&quot;%&quot;" sourceLinked="0"/>
+            <c:txPr>
+              <a:bodyPr/>
+              <a:lstStyle/>
+              <a:p>
+                <a:pPr>
+                  <a:defRPr b="0" i="0" strike="noStrike" sz="2200" u="none">
+                    <a:solidFill>
+                      <a:srgbClr val="1B2433"/>
+                    </a:solidFill>
+                    <a:latin typeface="Arial"/>
+                  </a:defRPr>
+                </a:pPr>
+              </a:p>
+            </c:txPr>
+            <c:showLegendKey val="0"/>
+            <c:showVal val="1"/>
+            <c:showCatName val="0"/>
+            <c:showSerName val="0"/>
+            <c:showPercent val="0"/>
+            <c:showBubbleSize val="0"/>
+            <c:showLeaderLines val="0"/>
+          </c:dLbls>
+          <c:dPt>
+            <c:idx val="0"/>
+            <c:invertIfNegative val="0"/>
+            <c:bubble3D val="0"/>
+            <c:spPr>
+              <a:solidFill>
+                <a:srgbClr val="EB6834"/>
+              </a:solidFill>
+              <a:effectLst/>
+            </c:spPr>
+          </c:dPt>
+          <c:dPt>
+            <c:idx val="1"/>
+            <c:invertIfNegative val="0"/>
+            <c:bubble3D val="0"/>
+            <c:spPr>
+              <a:solidFill>
+                <a:srgbClr val="1BAF7A"/>
+              </a:solidFill>
+              <a:effectLst/>
+            </c:spPr>
+          </c:dPt>
+          <c:dPt>
+            <c:idx val="2"/>
+            <c:invertIfNegative val="0"/>
+            <c:bubble3D val="0"/>
+            <c:spPr>
+              <a:solidFill>
+                <a:srgbClr val="2A78D6"/>
+              </a:solidFill>
+              <a:effectLst/>
+            </c:spPr>
+          </c:dPt>
+          <c:cat>
+            <c:multiLvlStrRef>
+              <c:f>Sheet1!$A$2:$A$4</c:f>
+              <c:multiLvlStrCache>
+                <c:ptCount val="3"/>
+                <c:lvl>
+                  <c:pt idx="0">
+                    <c:v>IA-1</c:v>
+                  </c:pt>
+                  <c:pt idx="1">
+                    <c:v>Paper</c:v>
+                  </c:pt>
+                  <c:pt idx="2">
+                    <c:v>IA-2</c:v>
+                  </c:pt>
+                </c:lvl>
+              </c:multiLvlStrCache>
+            </c:multiLvlStrRef>
+          </c:cat>
+          <c:val>
+            <c:numRef>
+              <c:f>Sheet1!$B$2:$B$4</c:f>
+              <c:numCache>
+                <c:formatCode>General</c:formatCode>
+                <c:ptCount val="3"/>
+                <c:pt idx="0">
+                  <c:v>6.4</c:v>
+                </c:pt>
+                <c:pt idx="1">
+                  <c:v>14.8</c:v>
+                </c:pt>
+                <c:pt idx="2">
+                  <c:v>33.9</c:v>
+                </c:pt>
+              </c:numCache>
+            </c:numRef>
+          </c:val>
+        </c:ser>
+        <c:dLbls>
+          <c:numFmt formatCode="0&quot;%&quot;" sourceLinked="0"/>
+          <c:txPr>
+            <a:bodyPr/>
+            <a:lstStyle/>
+            <a:p>
+              <a:pPr>
+                <a:defRPr b="0" i="0" strike="noStrike" sz="2200" u="none">
+                  <a:solidFill>
+                    <a:srgbClr val="1B2433"/>
+                  </a:solidFill>
+                  <a:latin typeface="Arial"/>
+                </a:defRPr>
+              </a:pPr>
+            </a:p>
+          </c:txPr>
+          <c:showLegendKey val="0"/>
+          <c:showVal val="1"/>
+          <c:showCatName val="0"/>
+          <c:showSerName val="0"/>
+          <c:showPercent val="0"/>
+          <c:showBubbleSize val="0"/>
+          <c:showLeaderLines val="0"/>
+        </c:dLbls>
+        <c:gapWidth val="50"/>
+        <c:overlap val="0"/>
+        <c:axId val="2094734554"/>
+        <c:axId val="2094734552"/>
+        <c:axId val="2094734556"/>
+      </c:barChart>
+      <c:catAx>
+        <c:axId val="2094734554"/>
+        <c:scaling>
+          <c:orientation val="minMax"/>
+        </c:scaling>
+        <c:delete val="0"/>
+        <c:axPos val="b"/>
+        <c:numFmt formatCode="General" sourceLinked="1"/>
+        <c:majorTickMark val="out"/>
+        <c:minorTickMark val="none"/>
+        <c:tickLblPos val="low"/>
+        <c:spPr>
+          <a:ln w="12700" cap="flat">
+            <a:solidFill>
+              <a:srgbClr val="888888"/>
+            </a:solidFill>
+            <a:prstDash val="solid"/>
+            <a:round/>
+          </a:ln>
+        </c:spPr>
+        <c:txPr>
+          <a:bodyPr/>
+          <a:lstStyle/>
+          <a:p>
+            <a:pPr>
+              <a:defRPr sz="2000" b="0" i="0" u="none" strike="noStrike">
+                <a:solidFill>
+                  <a:srgbClr val="000000"/>
+                </a:solidFill>
+                <a:latin typeface="Arial"/>
+              </a:defRPr>
+            </a:pPr>
+            <a:endParaRPr lang="en-US"/>
+          </a:p>
+        </c:txPr>
+        <c:crossAx val="2094734552"/>
+        <c:crosses val="autoZero"/>
+        <c:auto val="1"/>
+        <c:lblAlgn val="ctr"/>
+        <c:noMultiLvlLbl val="1"/>
+      </c:catAx>
+      <c:valAx>
+        <c:axId val="2094734552"/>
+        <c:scaling>
+          <c:orientation val="minMax"/>
+          <c:max val="40"/>
+        </c:scaling>
+        <c:delete val="0"/>
+        <c:axPos val="l"/>
+        <c:majorGridlines>
+          <c:spPr>
+            <a:ln w="6350" cap="flat">
+              <a:solidFill>
+                <a:srgbClr val="E5E4DF"/>
+              </a:solidFill>
+              <a:prstDash val="solid"/>
+              <a:round/>
+            </a:ln>
+          </c:spPr>
+        </c:majorGridlines>
+        <c:numFmt formatCode="General" sourceLinked="0"/>
+        <c:majorTickMark val="out"/>
+        <c:minorTickMark val="none"/>
+        <c:tickLblPos val="nextTo"/>
+        <c:spPr>
+          <a:ln w="12700" cap="flat">
+            <a:solidFill>
+              <a:srgbClr val="888888"/>
+            </a:solidFill>
+            <a:prstDash val="solid"/>
+            <a:round/>
+          </a:ln>
+        </c:spPr>
+        <c:txPr>
+          <a:bodyPr/>
+          <a:lstStyle/>
+          <a:p>
+            <a:pPr>
+              <a:defRPr sz="1400" b="0" i="0" u="none" strike="noStrike">
+                <a:solidFill>
+                  <a:srgbClr val="000000"/>
+                </a:solidFill>
+                <a:latin typeface="Arial"/>
+              </a:defRPr>
+            </a:pPr>
+            <a:endParaRPr lang="en-US"/>
+          </a:p>
+        </c:txPr>
+        <c:crossAx val="2094734554"/>
+        <c:crosses val="autoZero"/>
+        <c:crossBetween val="between"/>
+      </c:valAx>
+      <c:spPr>
+        <a:noFill/>
+        <a:ln>
+          <a:noFill/>
+        </a:ln>
+        <a:effectLst/>
+      </c:spPr>
+    </c:plotArea>
+    <c:plotVisOnly val="1"/>
+    <c:dispBlanksAs val="span"/>
+  </c:chart>
+  <c:spPr>
+    <a:noFill/>
+    <a:ln>
+      <a:noFill/>
+    </a:ln>
+    <a:effectLst/>
+  </c:spPr>
+  <c:externalData r:id="rId1">
+    <c:autoUpdate val="0"/>
+  </c:externalData>
+</c:chartSpace>
 </file>
 
 <file path=ppt/notesMasters/notesMaster1.xml><?xml version="1.0" encoding="utf-8"?>
@@ -884,7 +1187,7 @@
         <p:spPr>
           <a:xfrm>
             <a:off x="0" y="0"/>
-            <a:ext cx="21387816" cy="4480560"/>
+            <a:ext cx="21387816" cy="4114800"/>
           </a:xfrm>
           <a:prstGeom prst="rect">
             <a:avLst/>
@@ -909,7 +1212,7 @@
         <p:spPr>
           <a:xfrm>
             <a:off x="822960" y="411480"/>
-            <a:ext cx="19751040" cy="2514600"/>
+            <a:ext cx="19751040" cy="1371600"/>
           </a:xfrm>
           <a:prstGeom prst="rect">
             <a:avLst/>
@@ -925,7 +1228,7 @@
               <a:buNone/>
             </a:pPr>
             <a:r>
-              <a:rPr lang="en-US" sz="5400" b="1" dirty="0">
+              <a:rPr lang="en-US" sz="6400" b="1" dirty="0">
                 <a:solidFill>
                   <a:srgbClr val="FFFFFF"/>
                 </a:solidFill>
@@ -933,9 +1236,9 @@
                 <a:ea typeface="Cambria" pitchFamily="34" charset="-122"/>
                 <a:cs typeface="Cambria" pitchFamily="34" charset="-120"/>
               </a:rPr>
-              <a:t>Recipe-Guided Iterated Local Search around SLP for the Fixed-Demand Pooling Problem: Extending our IA-1 Filter-SLP Code</a:t>
-            </a:r>
-            <a:endParaRPr lang="en-US" sz="5400" dirty="0"/>
+              <a:t>Smarter Restarts for Feed-Blending Optimization</a:t>
+            </a:r>
+            <a:endParaRPr lang="en-US" sz="6400" dirty="0"/>
           </a:p>
         </p:txBody>
       </p:sp>
@@ -947,7 +1250,46 @@
         </p:nvSpPr>
         <p:spPr>
           <a:xfrm>
-            <a:off x="822960" y="3063240"/>
+            <a:off x="822960" y="1783080"/>
+            <a:ext cx="19751040" cy="731520"/>
+          </a:xfrm>
+          <a:prstGeom prst="rect">
+            <a:avLst/>
+          </a:prstGeom>
+          <a:noFill/>
+          <a:ln/>
+        </p:spPr>
+        <p:txBody>
+          <a:bodyPr wrap="square" lIns="1270" tIns="1270" rIns="1270" bIns="1270" rtlCol="0" anchor="t"/>
+          <a:lstStyle/>
+          <a:p>
+            <a:pPr indent="0" marL="0">
+              <a:buNone/>
+            </a:pPr>
+            <a:r>
+              <a:rPr lang="en-US" sz="3000" dirty="0">
+                <a:solidFill>
+                  <a:srgbClr val="DCE6F2"/>
+                </a:solidFill>
+                <a:latin typeface="Calibri" pitchFamily="34" charset="0"/>
+                <a:ea typeface="Calibri" pitchFamily="34" charset="-122"/>
+                <a:cs typeface="Calibri" pitchFamily="34" charset="-120"/>
+              </a:rPr>
+              <a:t>Improving Sequential Linear Programming (SLP) for the pooling problem: from our IA-1 re-implementation to IA-2</a:t>
+            </a:r>
+            <a:endParaRPr lang="en-US" sz="3000" dirty="0"/>
+          </a:p>
+        </p:txBody>
+      </p:sp>
+      <p:sp>
+        <p:nvSpPr>
+          <p:cNvPr id="5" name="Text 3"/>
+          <p:cNvSpPr txBox="1"/>
+          <p:nvPr/>
+        </p:nvSpPr>
+        <p:spPr>
+          <a:xfrm>
+            <a:off x="822960" y="2606040"/>
             <a:ext cx="19751040" cy="548640"/>
           </a:xfrm>
           <a:prstGeom prst="rect">
@@ -964,7 +1306,7 @@
               <a:buNone/>
             </a:pPr>
             <a:r>
-              <a:rPr lang="en-US" sz="2800" dirty="0">
+              <a:rPr lang="en-US" sz="2600" dirty="0">
                 <a:solidFill>
                   <a:srgbClr val="DCE6F2"/>
                 </a:solidFill>
@@ -974,19 +1316,19 @@
               </a:rPr>
               <a:t>Group OPT-09  ·  Razzan Tambe (15)  ·  Saurabh Tripathi (04)  ·  Vivek Sharma (12)</a:t>
             </a:r>
-            <a:endParaRPr lang="en-US" sz="2800" dirty="0"/>
-          </a:p>
-        </p:txBody>
-      </p:sp>
-      <p:sp>
-        <p:nvSpPr>
-          <p:cNvPr id="5" name="Text 3"/>
-          <p:cNvSpPr txBox="1"/>
-          <p:nvPr/>
-        </p:nvSpPr>
-        <p:spPr>
-          <a:xfrm>
-            <a:off x="822960" y="3611880"/>
+            <a:endParaRPr lang="en-US" sz="2600" dirty="0"/>
+          </a:p>
+        </p:txBody>
+      </p:sp>
+      <p:sp>
+        <p:nvSpPr>
+          <p:cNvPr id="6" name="Text 4"/>
+          <p:cNvSpPr txBox="1"/>
+          <p:nvPr/>
+        </p:nvSpPr>
+        <p:spPr>
+          <a:xfrm>
+            <a:off x="822960" y="3200400"/>
             <a:ext cx="19751040" cy="548640"/>
           </a:xfrm>
           <a:prstGeom prst="rect">
@@ -1003,7 +1345,7 @@
               <a:buNone/>
             </a:pPr>
             <a:r>
-              <a:rPr lang="en-US" sz="2400" dirty="0">
+              <a:rPr lang="en-US" sz="2200" dirty="0">
                 <a:solidFill>
                   <a:srgbClr val="B8C4D4"/>
                 </a:solidFill>
@@ -1013,29 +1355,93 @@
               </a:rPr>
               <a:t>Introduction to Optimization Techniques (IA-2)  ·  Dept. of IT, K. J. Somaiya College of Engineering</a:t>
             </a:r>
-            <a:endParaRPr lang="en-US" sz="2400" dirty="0"/>
-          </a:p>
-        </p:txBody>
-      </p:sp>
-      <p:sp>
-        <p:nvSpPr>
-          <p:cNvPr id="6" name="Text 4"/>
-          <p:cNvSpPr txBox="1"/>
-          <p:nvPr/>
-        </p:nvSpPr>
-        <p:spPr>
-          <a:xfrm>
-            <a:off x="822960" y="4937760"/>
-            <a:ext cx="9509760" cy="822960"/>
-          </a:xfrm>
-          <a:prstGeom prst="rect">
-            <a:avLst/>
-          </a:prstGeom>
-          <a:noFill/>
-          <a:ln/>
-        </p:spPr>
-        <p:txBody>
-          <a:bodyPr wrap="square" lIns="1270" tIns="1270" rIns="1270" bIns="1270" rtlCol="0" anchor="t"/>
+            <a:endParaRPr lang="en-US" sz="2200" dirty="0"/>
+          </a:p>
+        </p:txBody>
+      </p:sp>
+      <p:sp>
+        <p:nvSpPr>
+          <p:cNvPr id="7" name="Shape 5"/>
+          <p:cNvSpPr/>
+          <p:nvPr/>
+        </p:nvSpPr>
+        <p:spPr>
+          <a:xfrm>
+            <a:off x="822960" y="4617720"/>
+            <a:ext cx="777240" cy="777240"/>
+          </a:xfrm>
+          <a:prstGeom prst="ellipse">
+            <a:avLst/>
+          </a:prstGeom>
+          <a:solidFill>
+            <a:srgbClr val="16324F"/>
+          </a:solidFill>
+          <a:ln w="12700">
+            <a:solidFill>
+              <a:srgbClr val="16324F"/>
+            </a:solidFill>
+            <a:prstDash val="solid"/>
+          </a:ln>
+        </p:spPr>
+      </p:sp>
+      <p:sp>
+        <p:nvSpPr>
+          <p:cNvPr id="8" name="Text 6"/>
+          <p:cNvSpPr txBox="1"/>
+          <p:nvPr/>
+        </p:nvSpPr>
+        <p:spPr>
+          <a:xfrm>
+            <a:off x="822960" y="4617720"/>
+            <a:ext cx="777240" cy="777240"/>
+          </a:xfrm>
+          <a:prstGeom prst="rect">
+            <a:avLst/>
+          </a:prstGeom>
+          <a:noFill/>
+          <a:ln/>
+        </p:spPr>
+        <p:txBody>
+          <a:bodyPr wrap="square" lIns="0" tIns="0" rIns="0" bIns="0" rtlCol="0" anchor="ctr"/>
+          <a:lstStyle/>
+          <a:p>
+            <a:pPr algn="ctr" indent="0" marL="0">
+              <a:buNone/>
+            </a:pPr>
+            <a:r>
+              <a:rPr lang="en-US" sz="3000" b="1" dirty="0">
+                <a:solidFill>
+                  <a:srgbClr val="FFFFFF"/>
+                </a:solidFill>
+                <a:latin typeface="Calibri" pitchFamily="34" charset="0"/>
+                <a:ea typeface="Calibri" pitchFamily="34" charset="-122"/>
+                <a:cs typeface="Calibri" pitchFamily="34" charset="-120"/>
+              </a:rPr>
+              <a:t>1</a:t>
+            </a:r>
+            <a:endParaRPr lang="en-US" sz="3000" dirty="0"/>
+          </a:p>
+        </p:txBody>
+      </p:sp>
+      <p:sp>
+        <p:nvSpPr>
+          <p:cNvPr id="9" name="Text 7"/>
+          <p:cNvSpPr txBox="1"/>
+          <p:nvPr/>
+        </p:nvSpPr>
+        <p:spPr>
+          <a:xfrm>
+            <a:off x="1783080" y="4572000"/>
+            <a:ext cx="8641080" cy="868680"/>
+          </a:xfrm>
+          <a:prstGeom prst="rect">
+            <a:avLst/>
+          </a:prstGeom>
+          <a:noFill/>
+          <a:ln/>
+        </p:spPr>
+        <p:txBody>
+          <a:bodyPr wrap="square" lIns="1270" tIns="1270" rIns="1270" bIns="1270" rtlCol="0" anchor="ctr"/>
           <a:lstStyle/>
           <a:p>
             <a:pPr indent="0" marL="0">
@@ -1050,7 +1456,7 @@
                 <a:ea typeface="Cambria" pitchFamily="34" charset="-122"/>
                 <a:cs typeface="Cambria" pitchFamily="34" charset="-120"/>
               </a:rPr>
-              <a:t>1. Problem</a:t>
+              <a:t>The problem</a:t>
             </a:r>
             <a:endParaRPr lang="en-US" sz="4000" dirty="0"/>
           </a:p>
@@ -1058,14 +1464,342 @@
       </p:sp>
       <p:sp>
         <p:nvSpPr>
-          <p:cNvPr id="7" name="Text 5"/>
-          <p:cNvSpPr txBox="1"/>
-          <p:nvPr/>
-        </p:nvSpPr>
-        <p:spPr>
-          <a:xfrm>
-            <a:off x="822960" y="5806440"/>
-            <a:ext cx="9509760" cy="2377440"/>
+          <p:cNvPr id="10" name="Shape 8"/>
+          <p:cNvSpPr/>
+          <p:nvPr/>
+        </p:nvSpPr>
+        <p:spPr>
+          <a:xfrm>
+            <a:off x="822960" y="5623560"/>
+            <a:ext cx="9601200" cy="6492240"/>
+          </a:xfrm>
+          <a:prstGeom prst="roundRect">
+            <a:avLst>
+              <a:gd name="adj" fmla="val 3521"/>
+            </a:avLst>
+          </a:prstGeom>
+          <a:solidFill>
+            <a:srgbClr val="EEF3F8"/>
+          </a:solidFill>
+          <a:ln w="12700">
+            <a:solidFill>
+              <a:srgbClr val="EEF3F8"/>
+            </a:solidFill>
+            <a:prstDash val="solid"/>
+          </a:ln>
+        </p:spPr>
+      </p:sp>
+      <p:sp>
+        <p:nvSpPr>
+          <p:cNvPr id="11" name="Shape 9"/>
+          <p:cNvSpPr/>
+          <p:nvPr/>
+        </p:nvSpPr>
+        <p:spPr>
+          <a:xfrm>
+            <a:off x="3337560" y="6332220"/>
+            <a:ext cx="2057400" cy="781812"/>
+          </a:xfrm>
+          <a:prstGeom prst="line">
+            <a:avLst/>
+          </a:prstGeom>
+          <a:noFill/>
+          <a:ln w="19050">
+            <a:solidFill>
+              <a:srgbClr val="C9C8C2"/>
+            </a:solidFill>
+            <a:prstDash val="solid"/>
+          </a:ln>
+        </p:spPr>
+      </p:sp>
+      <p:sp>
+        <p:nvSpPr>
+          <p:cNvPr id="12" name="Shape 10"/>
+          <p:cNvSpPr/>
+          <p:nvPr/>
+        </p:nvSpPr>
+        <p:spPr>
+          <a:xfrm>
+            <a:off x="3337560" y="7200900"/>
+            <a:ext cx="2057400" cy="1563624"/>
+          </a:xfrm>
+          <a:prstGeom prst="line">
+            <a:avLst/>
+          </a:prstGeom>
+          <a:noFill/>
+          <a:ln w="19050">
+            <a:solidFill>
+              <a:srgbClr val="C9C8C2"/>
+            </a:solidFill>
+            <a:prstDash val="solid"/>
+          </a:ln>
+        </p:spPr>
+      </p:sp>
+      <p:sp>
+        <p:nvSpPr>
+          <p:cNvPr id="13" name="Shape 11"/>
+          <p:cNvSpPr/>
+          <p:nvPr/>
+        </p:nvSpPr>
+        <p:spPr>
+          <a:xfrm flipV="1">
+            <a:off x="3337560" y="7114032"/>
+            <a:ext cx="2057400" cy="955548"/>
+          </a:xfrm>
+          <a:prstGeom prst="line">
+            <a:avLst/>
+          </a:prstGeom>
+          <a:noFill/>
+          <a:ln w="19050">
+            <a:solidFill>
+              <a:srgbClr val="C9C8C2"/>
+            </a:solidFill>
+            <a:prstDash val="solid"/>
+          </a:ln>
+        </p:spPr>
+      </p:sp>
+      <p:sp>
+        <p:nvSpPr>
+          <p:cNvPr id="14" name="Shape 12"/>
+          <p:cNvSpPr/>
+          <p:nvPr/>
+        </p:nvSpPr>
+        <p:spPr>
+          <a:xfrm>
+            <a:off x="3337560" y="8069580"/>
+            <a:ext cx="2057400" cy="694944"/>
+          </a:xfrm>
+          <a:prstGeom prst="line">
+            <a:avLst/>
+          </a:prstGeom>
+          <a:noFill/>
+          <a:ln w="19050">
+            <a:solidFill>
+              <a:srgbClr val="C9C8C2"/>
+            </a:solidFill>
+            <a:prstDash val="solid"/>
+          </a:ln>
+        </p:spPr>
+      </p:sp>
+      <p:sp>
+        <p:nvSpPr>
+          <p:cNvPr id="15" name="Shape 13"/>
+          <p:cNvSpPr/>
+          <p:nvPr/>
+        </p:nvSpPr>
+        <p:spPr>
+          <a:xfrm flipV="1">
+            <a:off x="3337560" y="8764524"/>
+            <a:ext cx="2057400" cy="173736"/>
+          </a:xfrm>
+          <a:prstGeom prst="line">
+            <a:avLst/>
+          </a:prstGeom>
+          <a:noFill/>
+          <a:ln w="19050">
+            <a:solidFill>
+              <a:srgbClr val="C9C8C2"/>
+            </a:solidFill>
+            <a:prstDash val="solid"/>
+          </a:ln>
+        </p:spPr>
+      </p:sp>
+      <p:sp>
+        <p:nvSpPr>
+          <p:cNvPr id="16" name="Shape 14"/>
+          <p:cNvSpPr/>
+          <p:nvPr/>
+        </p:nvSpPr>
+        <p:spPr>
+          <a:xfrm flipV="1">
+            <a:off x="3337560" y="7114032"/>
+            <a:ext cx="2057400" cy="2692908"/>
+          </a:xfrm>
+          <a:prstGeom prst="line">
+            <a:avLst/>
+          </a:prstGeom>
+          <a:noFill/>
+          <a:ln w="19050">
+            <a:solidFill>
+              <a:srgbClr val="C9C8C2"/>
+            </a:solidFill>
+            <a:prstDash val="solid"/>
+          </a:ln>
+        </p:spPr>
+      </p:sp>
+      <p:sp>
+        <p:nvSpPr>
+          <p:cNvPr id="17" name="Shape 15"/>
+          <p:cNvSpPr/>
+          <p:nvPr/>
+        </p:nvSpPr>
+        <p:spPr>
+          <a:xfrm flipV="1">
+            <a:off x="6080760" y="6679692"/>
+            <a:ext cx="2057400" cy="434340"/>
+          </a:xfrm>
+          <a:prstGeom prst="line">
+            <a:avLst/>
+          </a:prstGeom>
+          <a:noFill/>
+          <a:ln w="19050">
+            <a:solidFill>
+              <a:srgbClr val="C9C8C2"/>
+            </a:solidFill>
+            <a:prstDash val="solid"/>
+          </a:ln>
+        </p:spPr>
+      </p:sp>
+      <p:sp>
+        <p:nvSpPr>
+          <p:cNvPr id="18" name="Shape 16"/>
+          <p:cNvSpPr/>
+          <p:nvPr/>
+        </p:nvSpPr>
+        <p:spPr>
+          <a:xfrm>
+            <a:off x="6080760" y="7114032"/>
+            <a:ext cx="2057400" cy="955548"/>
+          </a:xfrm>
+          <a:prstGeom prst="line">
+            <a:avLst/>
+          </a:prstGeom>
+          <a:noFill/>
+          <a:ln w="19050">
+            <a:solidFill>
+              <a:srgbClr val="C9C8C2"/>
+            </a:solidFill>
+            <a:prstDash val="solid"/>
+          </a:ln>
+        </p:spPr>
+      </p:sp>
+      <p:sp>
+        <p:nvSpPr>
+          <p:cNvPr id="19" name="Shape 17"/>
+          <p:cNvSpPr/>
+          <p:nvPr/>
+        </p:nvSpPr>
+        <p:spPr>
+          <a:xfrm>
+            <a:off x="6080760" y="7114032"/>
+            <a:ext cx="2057400" cy="2345436"/>
+          </a:xfrm>
+          <a:prstGeom prst="line">
+            <a:avLst/>
+          </a:prstGeom>
+          <a:noFill/>
+          <a:ln w="19050">
+            <a:solidFill>
+              <a:srgbClr val="C9C8C2"/>
+            </a:solidFill>
+            <a:prstDash val="solid"/>
+          </a:ln>
+        </p:spPr>
+      </p:sp>
+      <p:sp>
+        <p:nvSpPr>
+          <p:cNvPr id="20" name="Shape 18"/>
+          <p:cNvSpPr/>
+          <p:nvPr/>
+        </p:nvSpPr>
+        <p:spPr>
+          <a:xfrm flipV="1">
+            <a:off x="6080760" y="6679692"/>
+            <a:ext cx="2057400" cy="2084832"/>
+          </a:xfrm>
+          <a:prstGeom prst="line">
+            <a:avLst/>
+          </a:prstGeom>
+          <a:noFill/>
+          <a:ln w="19050">
+            <a:solidFill>
+              <a:srgbClr val="C9C8C2"/>
+            </a:solidFill>
+            <a:prstDash val="solid"/>
+          </a:ln>
+        </p:spPr>
+      </p:sp>
+      <p:sp>
+        <p:nvSpPr>
+          <p:cNvPr id="21" name="Shape 19"/>
+          <p:cNvSpPr/>
+          <p:nvPr/>
+        </p:nvSpPr>
+        <p:spPr>
+          <a:xfrm flipV="1">
+            <a:off x="6080760" y="8069580"/>
+            <a:ext cx="2057400" cy="694944"/>
+          </a:xfrm>
+          <a:prstGeom prst="line">
+            <a:avLst/>
+          </a:prstGeom>
+          <a:noFill/>
+          <a:ln w="19050">
+            <a:solidFill>
+              <a:srgbClr val="C9C8C2"/>
+            </a:solidFill>
+            <a:prstDash val="solid"/>
+          </a:ln>
+        </p:spPr>
+      </p:sp>
+      <p:sp>
+        <p:nvSpPr>
+          <p:cNvPr id="22" name="Shape 20"/>
+          <p:cNvSpPr/>
+          <p:nvPr/>
+        </p:nvSpPr>
+        <p:spPr>
+          <a:xfrm>
+            <a:off x="6080760" y="8764524"/>
+            <a:ext cx="2057400" cy="694944"/>
+          </a:xfrm>
+          <a:prstGeom prst="line">
+            <a:avLst/>
+          </a:prstGeom>
+          <a:noFill/>
+          <a:ln w="19050">
+            <a:solidFill>
+              <a:srgbClr val="C9C8C2"/>
+            </a:solidFill>
+            <a:prstDash val="solid"/>
+          </a:ln>
+        </p:spPr>
+      </p:sp>
+      <p:sp>
+        <p:nvSpPr>
+          <p:cNvPr id="23" name="Shape 21"/>
+          <p:cNvSpPr/>
+          <p:nvPr/>
+        </p:nvSpPr>
+        <p:spPr>
+          <a:xfrm>
+            <a:off x="2651760" y="5989320"/>
+            <a:ext cx="685800" cy="685800"/>
+          </a:xfrm>
+          <a:prstGeom prst="ellipse">
+            <a:avLst/>
+          </a:prstGeom>
+          <a:solidFill>
+            <a:srgbClr val="9AA9BC"/>
+          </a:solidFill>
+          <a:ln w="12700">
+            <a:solidFill>
+              <a:srgbClr val="9AA9BC"/>
+            </a:solidFill>
+            <a:prstDash val="solid"/>
+          </a:ln>
+        </p:spPr>
+      </p:sp>
+      <p:sp>
+        <p:nvSpPr>
+          <p:cNvPr id="24" name="Text 22"/>
+          <p:cNvSpPr txBox="1"/>
+          <p:nvPr/>
+        </p:nvSpPr>
+        <p:spPr>
+          <a:xfrm>
+            <a:off x="1188720" y="6099048"/>
+            <a:ext cx="1371600" cy="502920"/>
           </a:xfrm>
           <a:prstGeom prst="rect">
             <a:avLst/>
@@ -1077,14 +1811,626 @@
           <a:bodyPr wrap="square" lIns="1270" tIns="1270" rIns="1270" bIns="1270" rtlCol="0" anchor="t"/>
           <a:lstStyle/>
           <a:p>
+            <a:pPr algn="r" indent="0" marL="0">
+              <a:buNone/>
+            </a:pPr>
+            <a:r>
+              <a:rPr lang="en-US" sz="1800" dirty="0">
+                <a:solidFill>
+                  <a:srgbClr val="52514E"/>
+                </a:solidFill>
+                <a:latin typeface="Calibri" pitchFamily="34" charset="0"/>
+                <a:ea typeface="Calibri" pitchFamily="34" charset="-122"/>
+                <a:cs typeface="Calibri" pitchFamily="34" charset="-120"/>
+              </a:rPr>
+              <a:t>maize</a:t>
+            </a:r>
+            <a:endParaRPr lang="en-US" sz="1800" dirty="0"/>
+          </a:p>
+        </p:txBody>
+      </p:sp>
+      <p:sp>
+        <p:nvSpPr>
+          <p:cNvPr id="25" name="Shape 23"/>
+          <p:cNvSpPr/>
+          <p:nvPr/>
+        </p:nvSpPr>
+        <p:spPr>
+          <a:xfrm>
+            <a:off x="2651760" y="6858000"/>
+            <a:ext cx="685800" cy="685800"/>
+          </a:xfrm>
+          <a:prstGeom prst="ellipse">
+            <a:avLst/>
+          </a:prstGeom>
+          <a:solidFill>
+            <a:srgbClr val="9AA9BC"/>
+          </a:solidFill>
+          <a:ln w="12700">
+            <a:solidFill>
+              <a:srgbClr val="9AA9BC"/>
+            </a:solidFill>
+            <a:prstDash val="solid"/>
+          </a:ln>
+        </p:spPr>
+      </p:sp>
+      <p:sp>
+        <p:nvSpPr>
+          <p:cNvPr id="26" name="Text 24"/>
+          <p:cNvSpPr txBox="1"/>
+          <p:nvPr/>
+        </p:nvSpPr>
+        <p:spPr>
+          <a:xfrm>
+            <a:off x="1188720" y="6967728"/>
+            <a:ext cx="1371600" cy="502920"/>
+          </a:xfrm>
+          <a:prstGeom prst="rect">
+            <a:avLst/>
+          </a:prstGeom>
+          <a:noFill/>
+          <a:ln/>
+        </p:spPr>
+        <p:txBody>
+          <a:bodyPr wrap="square" lIns="1270" tIns="1270" rIns="1270" bIns="1270" rtlCol="0" anchor="t"/>
+          <a:lstStyle/>
+          <a:p>
+            <a:pPr algn="r" indent="0" marL="0">
+              <a:buNone/>
+            </a:pPr>
+            <a:r>
+              <a:rPr lang="en-US" sz="1800" dirty="0">
+                <a:solidFill>
+                  <a:srgbClr val="52514E"/>
+                </a:solidFill>
+                <a:latin typeface="Calibri" pitchFamily="34" charset="0"/>
+                <a:ea typeface="Calibri" pitchFamily="34" charset="-122"/>
+                <a:cs typeface="Calibri" pitchFamily="34" charset="-120"/>
+              </a:rPr>
+              <a:t>soya</a:t>
+            </a:r>
+            <a:endParaRPr lang="en-US" sz="1800" dirty="0"/>
+          </a:p>
+        </p:txBody>
+      </p:sp>
+      <p:sp>
+        <p:nvSpPr>
+          <p:cNvPr id="27" name="Shape 25"/>
+          <p:cNvSpPr/>
+          <p:nvPr/>
+        </p:nvSpPr>
+        <p:spPr>
+          <a:xfrm>
+            <a:off x="2651760" y="7726680"/>
+            <a:ext cx="685800" cy="685800"/>
+          </a:xfrm>
+          <a:prstGeom prst="ellipse">
+            <a:avLst/>
+          </a:prstGeom>
+          <a:solidFill>
+            <a:srgbClr val="9AA9BC"/>
+          </a:solidFill>
+          <a:ln w="12700">
+            <a:solidFill>
+              <a:srgbClr val="9AA9BC"/>
+            </a:solidFill>
+            <a:prstDash val="solid"/>
+          </a:ln>
+        </p:spPr>
+      </p:sp>
+      <p:sp>
+        <p:nvSpPr>
+          <p:cNvPr id="28" name="Text 26"/>
+          <p:cNvSpPr txBox="1"/>
+          <p:nvPr/>
+        </p:nvSpPr>
+        <p:spPr>
+          <a:xfrm>
+            <a:off x="1188720" y="7836408"/>
+            <a:ext cx="1371600" cy="502920"/>
+          </a:xfrm>
+          <a:prstGeom prst="rect">
+            <a:avLst/>
+          </a:prstGeom>
+          <a:noFill/>
+          <a:ln/>
+        </p:spPr>
+        <p:txBody>
+          <a:bodyPr wrap="square" lIns="1270" tIns="1270" rIns="1270" bIns="1270" rtlCol="0" anchor="t"/>
+          <a:lstStyle/>
+          <a:p>
+            <a:pPr algn="r" indent="0" marL="0">
+              <a:buNone/>
+            </a:pPr>
+            <a:r>
+              <a:rPr lang="en-US" sz="1800" dirty="0">
+                <a:solidFill>
+                  <a:srgbClr val="52514E"/>
+                </a:solidFill>
+                <a:latin typeface="Calibri" pitchFamily="34" charset="0"/>
+                <a:ea typeface="Calibri" pitchFamily="34" charset="-122"/>
+                <a:cs typeface="Calibri" pitchFamily="34" charset="-120"/>
+              </a:rPr>
+              <a:t>wheat</a:t>
+            </a:r>
+            <a:endParaRPr lang="en-US" sz="1800" dirty="0"/>
+          </a:p>
+        </p:txBody>
+      </p:sp>
+      <p:sp>
+        <p:nvSpPr>
+          <p:cNvPr id="29" name="Shape 27"/>
+          <p:cNvSpPr/>
+          <p:nvPr/>
+        </p:nvSpPr>
+        <p:spPr>
+          <a:xfrm>
+            <a:off x="2651760" y="8595360"/>
+            <a:ext cx="685800" cy="685800"/>
+          </a:xfrm>
+          <a:prstGeom prst="ellipse">
+            <a:avLst/>
+          </a:prstGeom>
+          <a:solidFill>
+            <a:srgbClr val="9AA9BC"/>
+          </a:solidFill>
+          <a:ln w="12700">
+            <a:solidFill>
+              <a:srgbClr val="9AA9BC"/>
+            </a:solidFill>
+            <a:prstDash val="solid"/>
+          </a:ln>
+        </p:spPr>
+      </p:sp>
+      <p:sp>
+        <p:nvSpPr>
+          <p:cNvPr id="30" name="Text 28"/>
+          <p:cNvSpPr txBox="1"/>
+          <p:nvPr/>
+        </p:nvSpPr>
+        <p:spPr>
+          <a:xfrm>
+            <a:off x="1188720" y="8705088"/>
+            <a:ext cx="1371600" cy="502920"/>
+          </a:xfrm>
+          <a:prstGeom prst="rect">
+            <a:avLst/>
+          </a:prstGeom>
+          <a:noFill/>
+          <a:ln/>
+        </p:spPr>
+        <p:txBody>
+          <a:bodyPr wrap="square" lIns="1270" tIns="1270" rIns="1270" bIns="1270" rtlCol="0" anchor="t"/>
+          <a:lstStyle/>
+          <a:p>
+            <a:pPr algn="r" indent="0" marL="0">
+              <a:buNone/>
+            </a:pPr>
+            <a:r>
+              <a:rPr lang="en-US" sz="1800" dirty="0">
+                <a:solidFill>
+                  <a:srgbClr val="52514E"/>
+                </a:solidFill>
+                <a:latin typeface="Calibri" pitchFamily="34" charset="0"/>
+                <a:ea typeface="Calibri" pitchFamily="34" charset="-122"/>
+                <a:cs typeface="Calibri" pitchFamily="34" charset="-120"/>
+              </a:rPr>
+              <a:t>oil</a:t>
+            </a:r>
+            <a:endParaRPr lang="en-US" sz="1800" dirty="0"/>
+          </a:p>
+        </p:txBody>
+      </p:sp>
+      <p:sp>
+        <p:nvSpPr>
+          <p:cNvPr id="31" name="Shape 29"/>
+          <p:cNvSpPr/>
+          <p:nvPr/>
+        </p:nvSpPr>
+        <p:spPr>
+          <a:xfrm>
+            <a:off x="2651760" y="9464040"/>
+            <a:ext cx="685800" cy="685800"/>
+          </a:xfrm>
+          <a:prstGeom prst="ellipse">
+            <a:avLst/>
+          </a:prstGeom>
+          <a:solidFill>
+            <a:srgbClr val="9AA9BC"/>
+          </a:solidFill>
+          <a:ln w="12700">
+            <a:solidFill>
+              <a:srgbClr val="9AA9BC"/>
+            </a:solidFill>
+            <a:prstDash val="solid"/>
+          </a:ln>
+        </p:spPr>
+      </p:sp>
+      <p:sp>
+        <p:nvSpPr>
+          <p:cNvPr id="32" name="Text 30"/>
+          <p:cNvSpPr txBox="1"/>
+          <p:nvPr/>
+        </p:nvSpPr>
+        <p:spPr>
+          <a:xfrm>
+            <a:off x="1188720" y="9573768"/>
+            <a:ext cx="1371600" cy="502920"/>
+          </a:xfrm>
+          <a:prstGeom prst="rect">
+            <a:avLst/>
+          </a:prstGeom>
+          <a:noFill/>
+          <a:ln/>
+        </p:spPr>
+        <p:txBody>
+          <a:bodyPr wrap="square" lIns="1270" tIns="1270" rIns="1270" bIns="1270" rtlCol="0" anchor="t"/>
+          <a:lstStyle/>
+          <a:p>
+            <a:pPr algn="r" indent="0" marL="0">
+              <a:buNone/>
+            </a:pPr>
+            <a:r>
+              <a:rPr lang="en-US" sz="1800" dirty="0">
+                <a:solidFill>
+                  <a:srgbClr val="52514E"/>
+                </a:solidFill>
+                <a:latin typeface="Calibri" pitchFamily="34" charset="0"/>
+                <a:ea typeface="Calibri" pitchFamily="34" charset="-122"/>
+                <a:cs typeface="Calibri" pitchFamily="34" charset="-120"/>
+              </a:rPr>
+              <a:t>salt</a:t>
+            </a:r>
+            <a:endParaRPr lang="en-US" sz="1800" dirty="0"/>
+          </a:p>
+        </p:txBody>
+      </p:sp>
+      <p:sp>
+        <p:nvSpPr>
+          <p:cNvPr id="33" name="Shape 31"/>
+          <p:cNvSpPr/>
+          <p:nvPr/>
+        </p:nvSpPr>
+        <p:spPr>
+          <a:xfrm>
+            <a:off x="5212080" y="6588252"/>
+            <a:ext cx="1051560" cy="1051560"/>
+          </a:xfrm>
+          <a:prstGeom prst="ellipse">
+            <a:avLst/>
+          </a:prstGeom>
+          <a:solidFill>
+            <a:srgbClr val="2A78D6"/>
+          </a:solidFill>
+          <a:ln w="12700">
+            <a:solidFill>
+              <a:srgbClr val="2A78D6"/>
+            </a:solidFill>
+            <a:prstDash val="solid"/>
+          </a:ln>
+        </p:spPr>
+      </p:sp>
+      <p:sp>
+        <p:nvSpPr>
+          <p:cNvPr id="34" name="Text 32"/>
+          <p:cNvSpPr txBox="1"/>
+          <p:nvPr/>
+        </p:nvSpPr>
+        <p:spPr>
+          <a:xfrm>
+            <a:off x="4937760" y="6588252"/>
+            <a:ext cx="1600200" cy="1051560"/>
+          </a:xfrm>
+          <a:prstGeom prst="rect">
+            <a:avLst/>
+          </a:prstGeom>
+          <a:noFill/>
+          <a:ln/>
+        </p:spPr>
+        <p:txBody>
+          <a:bodyPr wrap="square" lIns="0" tIns="0" rIns="0" bIns="0" rtlCol="0" anchor="ctr"/>
+          <a:lstStyle/>
+          <a:p>
+            <a:pPr algn="ctr" indent="0" marL="0">
+              <a:buNone/>
+            </a:pPr>
+            <a:r>
+              <a:rPr lang="en-US" sz="1700" b="1" dirty="0">
+                <a:solidFill>
+                  <a:srgbClr val="FFFFFF"/>
+                </a:solidFill>
+                <a:latin typeface="Calibri" pitchFamily="34" charset="0"/>
+                <a:ea typeface="Calibri" pitchFamily="34" charset="-122"/>
+                <a:cs typeface="Calibri" pitchFamily="34" charset="-120"/>
+              </a:rPr>
+              <a:t>Bin 1</a:t>
+            </a:r>
+            <a:endParaRPr lang="en-US" sz="1700" dirty="0"/>
+          </a:p>
+        </p:txBody>
+      </p:sp>
+      <p:sp>
+        <p:nvSpPr>
+          <p:cNvPr id="35" name="Shape 33"/>
+          <p:cNvSpPr/>
+          <p:nvPr/>
+        </p:nvSpPr>
+        <p:spPr>
+          <a:xfrm>
+            <a:off x="5212080" y="8238744"/>
+            <a:ext cx="1051560" cy="1051560"/>
+          </a:xfrm>
+          <a:prstGeom prst="ellipse">
+            <a:avLst/>
+          </a:prstGeom>
+          <a:solidFill>
+            <a:srgbClr val="2A78D6"/>
+          </a:solidFill>
+          <a:ln w="12700">
+            <a:solidFill>
+              <a:srgbClr val="2A78D6"/>
+            </a:solidFill>
+            <a:prstDash val="solid"/>
+          </a:ln>
+        </p:spPr>
+      </p:sp>
+      <p:sp>
+        <p:nvSpPr>
+          <p:cNvPr id="36" name="Text 34"/>
+          <p:cNvSpPr txBox="1"/>
+          <p:nvPr/>
+        </p:nvSpPr>
+        <p:spPr>
+          <a:xfrm>
+            <a:off x="4937760" y="8238744"/>
+            <a:ext cx="1600200" cy="1051560"/>
+          </a:xfrm>
+          <a:prstGeom prst="rect">
+            <a:avLst/>
+          </a:prstGeom>
+          <a:noFill/>
+          <a:ln/>
+        </p:spPr>
+        <p:txBody>
+          <a:bodyPr wrap="square" lIns="0" tIns="0" rIns="0" bIns="0" rtlCol="0" anchor="ctr"/>
+          <a:lstStyle/>
+          <a:p>
+            <a:pPr algn="ctr" indent="0" marL="0">
+              <a:buNone/>
+            </a:pPr>
+            <a:r>
+              <a:rPr lang="en-US" sz="1700" b="1" dirty="0">
+                <a:solidFill>
+                  <a:srgbClr val="FFFFFF"/>
+                </a:solidFill>
+                <a:latin typeface="Calibri" pitchFamily="34" charset="0"/>
+                <a:ea typeface="Calibri" pitchFamily="34" charset="-122"/>
+                <a:cs typeface="Calibri" pitchFamily="34" charset="-120"/>
+              </a:rPr>
+              <a:t>Bin 2</a:t>
+            </a:r>
+            <a:endParaRPr lang="en-US" sz="1700" dirty="0"/>
+          </a:p>
+        </p:txBody>
+      </p:sp>
+      <p:sp>
+        <p:nvSpPr>
+          <p:cNvPr id="37" name="Shape 35"/>
+          <p:cNvSpPr/>
+          <p:nvPr/>
+        </p:nvSpPr>
+        <p:spPr>
+          <a:xfrm>
+            <a:off x="8138160" y="6336792"/>
+            <a:ext cx="685800" cy="685800"/>
+          </a:xfrm>
+          <a:prstGeom prst="ellipse">
+            <a:avLst/>
+          </a:prstGeom>
+          <a:solidFill>
+            <a:srgbClr val="1BAF7A"/>
+          </a:solidFill>
+          <a:ln w="12700">
+            <a:solidFill>
+              <a:srgbClr val="1BAF7A"/>
+            </a:solidFill>
+            <a:prstDash val="solid"/>
+          </a:ln>
+        </p:spPr>
+      </p:sp>
+      <p:sp>
+        <p:nvSpPr>
+          <p:cNvPr id="38" name="Text 36"/>
+          <p:cNvSpPr txBox="1"/>
+          <p:nvPr/>
+        </p:nvSpPr>
+        <p:spPr>
+          <a:xfrm>
+            <a:off x="8869680" y="6446520"/>
+            <a:ext cx="1463040" cy="502920"/>
+          </a:xfrm>
+          <a:prstGeom prst="rect">
+            <a:avLst/>
+          </a:prstGeom>
+          <a:noFill/>
+          <a:ln/>
+        </p:spPr>
+        <p:txBody>
+          <a:bodyPr wrap="square" lIns="1270" tIns="1270" rIns="1270" bIns="1270" rtlCol="0" anchor="t"/>
+          <a:lstStyle/>
+          <a:p>
             <a:pPr indent="0" marL="0">
-              <a:spcAft>
-                <a:spcPts val="1000"/>
-              </a:spcAft>
-              <a:buNone/>
-            </a:pPr>
-            <a:r>
-              <a:rPr lang="en-US" sz="2500" dirty="0">
+              <a:buNone/>
+            </a:pPr>
+            <a:r>
+              <a:rPr lang="en-US" sz="1800" dirty="0">
+                <a:solidFill>
+                  <a:srgbClr val="52514E"/>
+                </a:solidFill>
+                <a:latin typeface="Calibri" pitchFamily="34" charset="0"/>
+                <a:ea typeface="Calibri" pitchFamily="34" charset="-122"/>
+                <a:cs typeface="Calibri" pitchFamily="34" charset="-120"/>
+              </a:rPr>
+              <a:t>Feed A</a:t>
+            </a:r>
+            <a:endParaRPr lang="en-US" sz="1800" dirty="0"/>
+          </a:p>
+        </p:txBody>
+      </p:sp>
+      <p:sp>
+        <p:nvSpPr>
+          <p:cNvPr id="39" name="Shape 37"/>
+          <p:cNvSpPr/>
+          <p:nvPr/>
+        </p:nvSpPr>
+        <p:spPr>
+          <a:xfrm>
+            <a:off x="8138160" y="7726680"/>
+            <a:ext cx="685800" cy="685800"/>
+          </a:xfrm>
+          <a:prstGeom prst="ellipse">
+            <a:avLst/>
+          </a:prstGeom>
+          <a:solidFill>
+            <a:srgbClr val="1BAF7A"/>
+          </a:solidFill>
+          <a:ln w="12700">
+            <a:solidFill>
+              <a:srgbClr val="1BAF7A"/>
+            </a:solidFill>
+            <a:prstDash val="solid"/>
+          </a:ln>
+        </p:spPr>
+      </p:sp>
+      <p:sp>
+        <p:nvSpPr>
+          <p:cNvPr id="40" name="Text 38"/>
+          <p:cNvSpPr txBox="1"/>
+          <p:nvPr/>
+        </p:nvSpPr>
+        <p:spPr>
+          <a:xfrm>
+            <a:off x="8869680" y="7836408"/>
+            <a:ext cx="1463040" cy="502920"/>
+          </a:xfrm>
+          <a:prstGeom prst="rect">
+            <a:avLst/>
+          </a:prstGeom>
+          <a:noFill/>
+          <a:ln/>
+        </p:spPr>
+        <p:txBody>
+          <a:bodyPr wrap="square" lIns="1270" tIns="1270" rIns="1270" bIns="1270" rtlCol="0" anchor="t"/>
+          <a:lstStyle/>
+          <a:p>
+            <a:pPr indent="0" marL="0">
+              <a:buNone/>
+            </a:pPr>
+            <a:r>
+              <a:rPr lang="en-US" sz="1800" dirty="0">
+                <a:solidFill>
+                  <a:srgbClr val="52514E"/>
+                </a:solidFill>
+                <a:latin typeface="Calibri" pitchFamily="34" charset="0"/>
+                <a:ea typeface="Calibri" pitchFamily="34" charset="-122"/>
+                <a:cs typeface="Calibri" pitchFamily="34" charset="-120"/>
+              </a:rPr>
+              <a:t>Feed B</a:t>
+            </a:r>
+            <a:endParaRPr lang="en-US" sz="1800" dirty="0"/>
+          </a:p>
+        </p:txBody>
+      </p:sp>
+      <p:sp>
+        <p:nvSpPr>
+          <p:cNvPr id="41" name="Shape 39"/>
+          <p:cNvSpPr/>
+          <p:nvPr/>
+        </p:nvSpPr>
+        <p:spPr>
+          <a:xfrm>
+            <a:off x="8138160" y="9116568"/>
+            <a:ext cx="685800" cy="685800"/>
+          </a:xfrm>
+          <a:prstGeom prst="ellipse">
+            <a:avLst/>
+          </a:prstGeom>
+          <a:solidFill>
+            <a:srgbClr val="1BAF7A"/>
+          </a:solidFill>
+          <a:ln w="12700">
+            <a:solidFill>
+              <a:srgbClr val="1BAF7A"/>
+            </a:solidFill>
+            <a:prstDash val="solid"/>
+          </a:ln>
+        </p:spPr>
+      </p:sp>
+      <p:sp>
+        <p:nvSpPr>
+          <p:cNvPr id="42" name="Text 40"/>
+          <p:cNvSpPr txBox="1"/>
+          <p:nvPr/>
+        </p:nvSpPr>
+        <p:spPr>
+          <a:xfrm>
+            <a:off x="8869680" y="9226296"/>
+            <a:ext cx="1463040" cy="502920"/>
+          </a:xfrm>
+          <a:prstGeom prst="rect">
+            <a:avLst/>
+          </a:prstGeom>
+          <a:noFill/>
+          <a:ln/>
+        </p:spPr>
+        <p:txBody>
+          <a:bodyPr wrap="square" lIns="1270" tIns="1270" rIns="1270" bIns="1270" rtlCol="0" anchor="t"/>
+          <a:lstStyle/>
+          <a:p>
+            <a:pPr indent="0" marL="0">
+              <a:buNone/>
+            </a:pPr>
+            <a:r>
+              <a:rPr lang="en-US" sz="1800" dirty="0">
+                <a:solidFill>
+                  <a:srgbClr val="52514E"/>
+                </a:solidFill>
+                <a:latin typeface="Calibri" pitchFamily="34" charset="0"/>
+                <a:ea typeface="Calibri" pitchFamily="34" charset="-122"/>
+                <a:cs typeface="Calibri" pitchFamily="34" charset="-120"/>
+              </a:rPr>
+              <a:t>Feed C</a:t>
+            </a:r>
+            <a:endParaRPr lang="en-US" sz="1800" dirty="0"/>
+          </a:p>
+        </p:txBody>
+      </p:sp>
+      <p:sp>
+        <p:nvSpPr>
+          <p:cNvPr id="43" name="Text 41"/>
+          <p:cNvSpPr txBox="1"/>
+          <p:nvPr/>
+        </p:nvSpPr>
+        <p:spPr>
+          <a:xfrm>
+            <a:off x="1143000" y="10332720"/>
+            <a:ext cx="8961120" cy="1645920"/>
+          </a:xfrm>
+          <a:prstGeom prst="rect">
+            <a:avLst/>
+          </a:prstGeom>
+          <a:noFill/>
+          <a:ln/>
+        </p:spPr>
+        <p:txBody>
+          <a:bodyPr wrap="square" lIns="1270" tIns="1270" rIns="1270" bIns="1270" rtlCol="0" anchor="t"/>
+          <a:lstStyle/>
+          <a:p>
+            <a:pPr indent="0" marL="0">
+              <a:buNone/>
+            </a:pPr>
+            <a:r>
+              <a:rPr lang="en-US" sz="2400" dirty="0">
                 <a:solidFill>
                   <a:srgbClr val="1B2433"/>
                 </a:solidFill>
@@ -1092,19 +2438,27 @@
                 <a:ea typeface="Calibri" pitchFamily="34" charset="-122"/>
                 <a:cs typeface="Calibri" pitchFamily="34" charset="-120"/>
               </a:rPr>
-              <a:t>Feed mills blend raw materials through a few shared mixing bins into many products with nutrient specs and fixed demands.</a:t>
-            </a:r>
-            <a:endParaRPr lang="en-US" sz="2500" dirty="0"/>
-          </a:p>
-          <a:p>
+              <a:t>Raw materials go through a few </a:t>
+            </a:r>
             <a:pPr indent="0" marL="0">
-              <a:spcAft>
-                <a:spcPts val="1000"/>
-              </a:spcAft>
-              <a:buNone/>
-            </a:pPr>
-            <a:r>
-              <a:rPr lang="en-US" sz="2500" dirty="0">
+              <a:buNone/>
+            </a:pPr>
+            <a:r>
+              <a:rPr lang="en-US" sz="2400" b="1" dirty="0">
+                <a:solidFill>
+                  <a:srgbClr val="2A78D6"/>
+                </a:solidFill>
+                <a:latin typeface="Calibri" pitchFamily="34" charset="0"/>
+                <a:ea typeface="Calibri" pitchFamily="34" charset="-122"/>
+                <a:cs typeface="Calibri" pitchFamily="34" charset="-120"/>
+              </a:rPr>
+              <a:t>shared bins</a:t>
+            </a:r>
+            <a:pPr indent="0" marL="0">
+              <a:buNone/>
+            </a:pPr>
+            <a:r>
+              <a:rPr lang="en-US" sz="2400" dirty="0">
                 <a:solidFill>
                   <a:srgbClr val="1B2433"/>
                 </a:solidFill>
@@ -1112,31 +2466,109 @@
                 <a:ea typeface="Calibri" pitchFamily="34" charset="-122"/>
                 <a:cs typeface="Calibri" pitchFamily="34" charset="-120"/>
               </a:rPr>
-              <a:t>Bin compositions are decisions, so product quality Σ μ_pm v_mn is bilinear: nonconvex, with very many local optima.</a:t>
-            </a:r>
-            <a:endParaRPr lang="en-US" sz="2500" dirty="0"/>
-          </a:p>
-        </p:txBody>
-      </p:sp>
-      <p:sp>
-        <p:nvSpPr>
-          <p:cNvPr id="8" name="Text 6"/>
-          <p:cNvSpPr txBox="1"/>
-          <p:nvPr/>
-        </p:nvSpPr>
-        <p:spPr>
-          <a:xfrm>
-            <a:off x="822960" y="8321040"/>
-            <a:ext cx="9509760" cy="822960"/>
-          </a:xfrm>
-          <a:prstGeom prst="rect">
-            <a:avLst/>
-          </a:prstGeom>
-          <a:noFill/>
-          <a:ln/>
-        </p:spPr>
-        <p:txBody>
-          <a:bodyPr wrap="square" lIns="1270" tIns="1270" rIns="1270" bIns="1270" rtlCol="0" anchor="t"/>
+              <a:t> into many feeds. Every feed must meet nutrient limits. </a:t>
+            </a:r>
+            <a:pPr indent="0" marL="0">
+              <a:buNone/>
+            </a:pPr>
+            <a:r>
+              <a:rPr lang="en-US" sz="2400" b="1" dirty="0">
+                <a:solidFill>
+                  <a:srgbClr val="1B2433"/>
+                </a:solidFill>
+                <a:latin typeface="Calibri" pitchFamily="34" charset="0"/>
+                <a:ea typeface="Calibri" pitchFamily="34" charset="-122"/>
+                <a:cs typeface="Calibri" pitchFamily="34" charset="-120"/>
+              </a:rPr>
+              <a:t>Goal: the lowest total cost.</a:t>
+            </a:r>
+            <a:endParaRPr lang="en-US" sz="2400" dirty="0"/>
+          </a:p>
+        </p:txBody>
+      </p:sp>
+      <p:sp>
+        <p:nvSpPr>
+          <p:cNvPr id="44" name="Shape 42"/>
+          <p:cNvSpPr/>
+          <p:nvPr/>
+        </p:nvSpPr>
+        <p:spPr>
+          <a:xfrm>
+            <a:off x="10972800" y="4617720"/>
+            <a:ext cx="777240" cy="777240"/>
+          </a:xfrm>
+          <a:prstGeom prst="ellipse">
+            <a:avLst/>
+          </a:prstGeom>
+          <a:solidFill>
+            <a:srgbClr val="16324F"/>
+          </a:solidFill>
+          <a:ln w="12700">
+            <a:solidFill>
+              <a:srgbClr val="16324F"/>
+            </a:solidFill>
+            <a:prstDash val="solid"/>
+          </a:ln>
+        </p:spPr>
+      </p:sp>
+      <p:sp>
+        <p:nvSpPr>
+          <p:cNvPr id="45" name="Text 43"/>
+          <p:cNvSpPr txBox="1"/>
+          <p:nvPr/>
+        </p:nvSpPr>
+        <p:spPr>
+          <a:xfrm>
+            <a:off x="10972800" y="4617720"/>
+            <a:ext cx="777240" cy="777240"/>
+          </a:xfrm>
+          <a:prstGeom prst="rect">
+            <a:avLst/>
+          </a:prstGeom>
+          <a:noFill/>
+          <a:ln/>
+        </p:spPr>
+        <p:txBody>
+          <a:bodyPr wrap="square" lIns="0" tIns="0" rIns="0" bIns="0" rtlCol="0" anchor="ctr"/>
+          <a:lstStyle/>
+          <a:p>
+            <a:pPr algn="ctr" indent="0" marL="0">
+              <a:buNone/>
+            </a:pPr>
+            <a:r>
+              <a:rPr lang="en-US" sz="3000" b="1" dirty="0">
+                <a:solidFill>
+                  <a:srgbClr val="FFFFFF"/>
+                </a:solidFill>
+                <a:latin typeface="Calibri" pitchFamily="34" charset="0"/>
+                <a:ea typeface="Calibri" pitchFamily="34" charset="-122"/>
+                <a:cs typeface="Calibri" pitchFamily="34" charset="-120"/>
+              </a:rPr>
+              <a:t>2</a:t>
+            </a:r>
+            <a:endParaRPr lang="en-US" sz="3000" dirty="0"/>
+          </a:p>
+        </p:txBody>
+      </p:sp>
+      <p:sp>
+        <p:nvSpPr>
+          <p:cNvPr id="46" name="Text 44"/>
+          <p:cNvSpPr txBox="1"/>
+          <p:nvPr/>
+        </p:nvSpPr>
+        <p:spPr>
+          <a:xfrm>
+            <a:off x="11932920" y="4572000"/>
+            <a:ext cx="8641080" cy="868680"/>
+          </a:xfrm>
+          <a:prstGeom prst="rect">
+            <a:avLst/>
+          </a:prstGeom>
+          <a:noFill/>
+          <a:ln/>
+        </p:spPr>
+        <p:txBody>
+          <a:bodyPr wrap="square" lIns="1270" tIns="1270" rIns="1270" bIns="1270" rtlCol="0" anchor="ctr"/>
           <a:lstStyle/>
           <a:p>
             <a:pPr indent="0" marL="0">
@@ -1151,7 +2583,7 @@
                 <a:ea typeface="Cambria" pitchFamily="34" charset="-122"/>
                 <a:cs typeface="Cambria" pitchFamily="34" charset="-120"/>
               </a:rPr>
-              <a:t>2. Baseline &amp; research gap</a:t>
+              <a:t>Why it is hard, and the gap</a:t>
             </a:r>
             <a:endParaRPr lang="en-US" sz="4000" dirty="0"/>
           </a:p>
@@ -1159,18 +2591,18 @@
       </p:sp>
       <p:sp>
         <p:nvSpPr>
-          <p:cNvPr id="9" name="Shape 7"/>
-          <p:cNvSpPr/>
-          <p:nvPr/>
-        </p:nvSpPr>
-        <p:spPr>
-          <a:xfrm>
-            <a:off x="822960" y="9189720"/>
-            <a:ext cx="9509760" cy="4206240"/>
+          <p:cNvPr id="47" name="Shape 45"/>
+          <p:cNvSpPr/>
+          <p:nvPr/>
+        </p:nvSpPr>
+        <p:spPr>
+          <a:xfrm>
+            <a:off x="10972800" y="5623560"/>
+            <a:ext cx="9601200" cy="6492240"/>
           </a:xfrm>
           <a:prstGeom prst="roundRect">
             <a:avLst>
-              <a:gd name="adj" fmla="val 4348"/>
+              <a:gd name="adj" fmla="val 3521"/>
             </a:avLst>
           </a:prstGeom>
           <a:solidFill>
@@ -1186,14 +2618,14 @@
       </p:sp>
       <p:sp>
         <p:nvSpPr>
-          <p:cNvPr id="10" name="Text 8"/>
-          <p:cNvSpPr txBox="1"/>
-          <p:nvPr/>
-        </p:nvSpPr>
-        <p:spPr>
-          <a:xfrm>
-            <a:off x="1097280" y="9372600"/>
-            <a:ext cx="8961120" cy="3840480"/>
+          <p:cNvPr id="48" name="Text 46"/>
+          <p:cNvSpPr txBox="1"/>
+          <p:nvPr/>
+        </p:nvSpPr>
+        <p:spPr>
+          <a:xfrm>
+            <a:off x="11292840" y="5852160"/>
+            <a:ext cx="8961120" cy="2743200"/>
           </a:xfrm>
           <a:prstGeom prst="rect">
             <a:avLst/>
@@ -1207,12 +2639,12 @@
           <a:p>
             <a:pPr indent="0" marL="0">
               <a:spcAft>
-                <a:spcPts val="1200"/>
+                <a:spcPts val="1400"/>
               </a:spcAft>
               <a:buNone/>
             </a:pPr>
             <a:r>
-              <a:rPr lang="en-US" sz="2400" b="1" dirty="0">
+              <a:rPr lang="en-US" sz="2500" dirty="0">
                 <a:solidFill>
                   <a:srgbClr val="1B2433"/>
                 </a:solidFill>
@@ -1220,16 +2652,16 @@
                 <a:ea typeface="Calibri" pitchFamily="34" charset="-122"/>
                 <a:cs typeface="Calibri" pitchFamily="34" charset="-120"/>
               </a:rPr>
-              <a:t>Baseline: </a:t>
+              <a:t>A bin that suits one feed can hurt another: quality = share × content (two unknowns multiplied), so the problem has many </a:t>
             </a:r>
             <a:pPr indent="0" marL="0">
               <a:spcAft>
-                <a:spcPts val="1200"/>
+                <a:spcPts val="1400"/>
               </a:spcAft>
               <a:buNone/>
             </a:pPr>
             <a:r>
-              <a:rPr lang="en-US" sz="2400" dirty="0">
+              <a:rPr lang="en-US" sz="2500" b="1" dirty="0">
                 <a:solidFill>
                   <a:srgbClr val="1B2433"/>
                 </a:solidFill>
@@ -1237,36 +2669,36 @@
                 <a:ea typeface="Calibri" pitchFamily="34" charset="-122"/>
                 <a:cs typeface="Calibri" pitchFamily="34" charset="-120"/>
               </a:rPr>
-              <a:t>qq-formulation + trust-region filter SLP + random multistart [1], as re-implemented in our IA-1 code (qq_model.py, slp.py; Python + HiGHS).</a:t>
-            </a:r>
-            <a:endParaRPr lang="en-US" sz="2400" dirty="0"/>
-          </a:p>
-          <a:p>
+              <a:t>'valleys'</a:t>
+            </a:r>
             <a:pPr indent="0" marL="0">
               <a:spcAft>
-                <a:spcPts val="1200"/>
+                <a:spcPts val="1400"/>
               </a:spcAft>
               <a:buNone/>
             </a:pPr>
             <a:r>
-              <a:rPr lang="en-US" sz="2400" b="1" dirty="0">
-                <a:solidFill>
-                  <a:srgbClr val="EB6834"/>
-                </a:solidFill>
-                <a:latin typeface="Calibri" pitchFamily="34" charset="0"/>
-                <a:ea typeface="Calibri" pitchFamily="34" charset="-122"/>
-                <a:cs typeface="Calibri" pitchFamily="34" charset="-120"/>
-              </a:rPr>
-              <a:t>Gap: </a:t>
-            </a:r>
+              <a:rPr lang="en-US" sz="2500" dirty="0">
+                <a:solidFill>
+                  <a:srgbClr val="1B2433"/>
+                </a:solidFill>
+                <a:latin typeface="Calibri" pitchFamily="34" charset="0"/>
+                <a:ea typeface="Calibri" pitchFamily="34" charset="-122"/>
+                <a:cs typeface="Calibri" pitchFamily="34" charset="-120"/>
+              </a:rPr>
+              <a:t> (local optima).</a:t>
+            </a:r>
+            <a:endParaRPr lang="en-US" sz="2500" dirty="0"/>
+          </a:p>
+          <a:p>
             <a:pPr indent="0" marL="0">
               <a:spcAft>
-                <a:spcPts val="1200"/>
+                <a:spcPts val="1400"/>
               </a:spcAft>
               <a:buNone/>
             </a:pPr>
             <a:r>
-              <a:rPr lang="en-US" sz="2400" dirty="0">
+              <a:rPr lang="en-US" sz="2500" dirty="0">
                 <a:solidFill>
                   <a:srgbClr val="1B2433"/>
                 </a:solidFill>
@@ -1274,85 +2706,122 @@
                 <a:ea typeface="Calibri" pitchFamily="34" charset="-122"/>
                 <a:cs typeface="Calibri" pitchFamily="34" charset="-120"/>
               </a:rPr>
-              <a:t>in [1] only 4–20% of random starts are Good on the hard instances. With our IA-1 code, af-2, af-3 and af-6-fs never reached 0.2% and af-4 had 40% infeasible runs. Runs are independent and the LP structure is unused.</a:t>
-            </a:r>
-            <a:endParaRPr lang="en-US" sz="2400" dirty="0"/>
-          </a:p>
-        </p:txBody>
-      </p:sp>
-      <p:sp>
-        <p:nvSpPr>
-          <p:cNvPr id="11" name="Text 9"/>
-          <p:cNvSpPr txBox="1"/>
-          <p:nvPr/>
-        </p:nvSpPr>
-        <p:spPr>
-          <a:xfrm>
-            <a:off x="822960" y="13716000"/>
-            <a:ext cx="9509760" cy="822960"/>
-          </a:xfrm>
-          <a:prstGeom prst="rect">
-            <a:avLst/>
-          </a:prstGeom>
-          <a:noFill/>
-          <a:ln/>
-        </p:spPr>
-        <p:txBody>
-          <a:bodyPr wrap="square" lIns="1270" tIns="1270" rIns="1270" bIns="1270" rtlCol="0" anchor="t"/>
-          <a:lstStyle/>
-          <a:p>
+              <a:t>The paper's SLP (our IA-1 code) restarts from </a:t>
+            </a:r>
             <a:pPr indent="0" marL="0">
-              <a:buNone/>
-            </a:pPr>
-            <a:r>
-              <a:rPr lang="en-US" sz="4000" b="1" dirty="0">
-                <a:solidFill>
-                  <a:srgbClr val="16324F"/>
+              <a:spcAft>
+                <a:spcPts val="1400"/>
+              </a:spcAft>
+              <a:buNone/>
+            </a:pPr>
+            <a:r>
+              <a:rPr lang="en-US" sz="2500" b="1" dirty="0">
+                <a:solidFill>
+                  <a:srgbClr val="EB6834"/>
+                </a:solidFill>
+                <a:latin typeface="Calibri" pitchFamily="34" charset="0"/>
+                <a:ea typeface="Calibri" pitchFamily="34" charset="-122"/>
+                <a:cs typeface="Calibri" pitchFamily="34" charset="-120"/>
+              </a:rPr>
+              <a:t>random</a:t>
+            </a:r>
+            <a:pPr indent="0" marL="0">
+              <a:spcAft>
+                <a:spcPts val="1400"/>
+              </a:spcAft>
+              <a:buNone/>
+            </a:pPr>
+            <a:r>
+              <a:rPr lang="en-US" sz="2500" dirty="0">
+                <a:solidFill>
+                  <a:srgbClr val="1B2433"/>
+                </a:solidFill>
+                <a:latin typeface="Calibri" pitchFamily="34" charset="0"/>
+                <a:ea typeface="Calibri" pitchFamily="34" charset="-122"/>
+                <a:cs typeface="Calibri" pitchFamily="34" charset="-120"/>
+              </a:rPr>
+              <a:t> points, so it often ends in a poor valley.</a:t>
+            </a:r>
+            <a:endParaRPr lang="en-US" sz="2500" dirty="0"/>
+          </a:p>
+        </p:txBody>
+      </p:sp>
+      <p:sp>
+        <p:nvSpPr>
+          <p:cNvPr id="49" name="Shape 47"/>
+          <p:cNvSpPr/>
+          <p:nvPr/>
+        </p:nvSpPr>
+        <p:spPr>
+          <a:xfrm>
+            <a:off x="11292840" y="8641080"/>
+            <a:ext cx="4343400" cy="3246120"/>
+          </a:xfrm>
+          <a:prstGeom prst="roundRect">
+            <a:avLst>
+              <a:gd name="adj" fmla="val 7042"/>
+            </a:avLst>
+          </a:prstGeom>
+          <a:solidFill>
+            <a:srgbClr val="EEF3F8"/>
+          </a:solidFill>
+          <a:ln w="12700">
+            <a:solidFill>
+              <a:srgbClr val="EEF3F8"/>
+            </a:solidFill>
+            <a:prstDash val="solid"/>
+          </a:ln>
+        </p:spPr>
+      </p:sp>
+      <p:sp>
+        <p:nvSpPr>
+          <p:cNvPr id="50" name="Text 48"/>
+          <p:cNvSpPr txBox="1"/>
+          <p:nvPr/>
+        </p:nvSpPr>
+        <p:spPr>
+          <a:xfrm>
+            <a:off x="11475720" y="8823960"/>
+            <a:ext cx="3977640" cy="1687982"/>
+          </a:xfrm>
+          <a:prstGeom prst="rect">
+            <a:avLst/>
+          </a:prstGeom>
+          <a:noFill/>
+          <a:ln/>
+        </p:spPr>
+        <p:txBody>
+          <a:bodyPr wrap="square" lIns="1270" tIns="1270" rIns="1270" bIns="1270" rtlCol="0" anchor="ctr"/>
+          <a:lstStyle/>
+          <a:p>
+            <a:pPr algn="ctr" indent="0" marL="0">
+              <a:buNone/>
+            </a:pPr>
+            <a:r>
+              <a:rPr lang="en-US" sz="6000" b="1" dirty="0">
+                <a:solidFill>
+                  <a:srgbClr val="EB6834"/>
                 </a:solidFill>
                 <a:latin typeface="Cambria" pitchFamily="34" charset="0"/>
                 <a:ea typeface="Cambria" pitchFamily="34" charset="-122"/>
                 <a:cs typeface="Cambria" pitchFamily="34" charset="-120"/>
               </a:rPr>
-              <a:t>3. Proposed: RG-ILS-SLP</a:t>
-            </a:r>
-            <a:endParaRPr lang="en-US" sz="4000" dirty="0"/>
-          </a:p>
-        </p:txBody>
-      </p:sp>
-      <p:pic>
-        <p:nvPicPr>
-          <p:cNvPr id="12" name="Image 0" descr="fig_flowchart.png">    </p:cNvPr>
-          <p:cNvPicPr>
-            <a:picLocks noChangeAspect="1"/>
-          </p:cNvPicPr>
-          <p:nvPr/>
-        </p:nvPicPr>
-        <p:blipFill>
-          <a:blip r:embed="rId1"/>
-          <a:stretch>
-            <a:fillRect/>
-          </a:stretch>
-        </p:blipFill>
-        <p:spPr>
-          <a:xfrm>
-            <a:off x="2194560" y="14538960"/>
-            <a:ext cx="6766560" cy="8999081"/>
-          </a:xfrm>
-          <a:prstGeom prst="rect">
-            <a:avLst/>
-          </a:prstGeom>
-        </p:spPr>
-      </p:pic>
-      <p:sp>
-        <p:nvSpPr>
-          <p:cNvPr id="13" name="Text 10"/>
-          <p:cNvSpPr txBox="1"/>
-          <p:nvPr/>
-        </p:nvSpPr>
-        <p:spPr>
-          <a:xfrm>
-            <a:off x="822960" y="23720921"/>
-            <a:ext cx="9509760" cy="822960"/>
+              <a:t>6%</a:t>
+            </a:r>
+            <a:endParaRPr lang="en-US" sz="6000" dirty="0"/>
+          </a:p>
+        </p:txBody>
+      </p:sp>
+      <p:sp>
+        <p:nvSpPr>
+          <p:cNvPr id="51" name="Text 49"/>
+          <p:cNvSpPr txBox="1"/>
+          <p:nvPr/>
+        </p:nvSpPr>
+        <p:spPr>
+          <a:xfrm>
+            <a:off x="11521440" y="10458907"/>
+            <a:ext cx="3886200" cy="1363370"/>
           </a:xfrm>
           <a:prstGeom prst="rect">
             <a:avLst/>
@@ -1364,216 +2833,2109 @@
           <a:bodyPr wrap="square" lIns="1270" tIns="1270" rIns="1270" bIns="1270" rtlCol="0" anchor="t"/>
           <a:lstStyle/>
           <a:p>
-            <a:pPr indent="0" marL="0">
-              <a:buNone/>
-            </a:pPr>
-            <a:r>
-              <a:rPr lang="en-US" sz="4000" b="1" dirty="0">
-                <a:solidFill>
-                  <a:srgbClr val="16324F"/>
+            <a:pPr algn="ctr" indent="0" marL="0">
+              <a:buNone/>
+            </a:pPr>
+            <a:r>
+              <a:rPr lang="en-US" sz="2100" dirty="0">
+                <a:solidFill>
+                  <a:srgbClr val="52514E"/>
+                </a:solidFill>
+                <a:latin typeface="Calibri" pitchFamily="34" charset="0"/>
+                <a:ea typeface="Calibri" pitchFamily="34" charset="-122"/>
+                <a:cs typeface="Calibri" pitchFamily="34" charset="-120"/>
+              </a:rPr>
+              <a:t>Good runs on the 6 hard instances (IA-1)</a:t>
+            </a:r>
+            <a:endParaRPr lang="en-US" sz="2100" dirty="0"/>
+          </a:p>
+        </p:txBody>
+      </p:sp>
+      <p:sp>
+        <p:nvSpPr>
+          <p:cNvPr id="52" name="Shape 50"/>
+          <p:cNvSpPr/>
+          <p:nvPr/>
+        </p:nvSpPr>
+        <p:spPr>
+          <a:xfrm>
+            <a:off x="15910560" y="8641080"/>
+            <a:ext cx="4343400" cy="3246120"/>
+          </a:xfrm>
+          <a:prstGeom prst="roundRect">
+            <a:avLst>
+              <a:gd name="adj" fmla="val 7042"/>
+            </a:avLst>
+          </a:prstGeom>
+          <a:solidFill>
+            <a:srgbClr val="EEF3F8"/>
+          </a:solidFill>
+          <a:ln w="12700">
+            <a:solidFill>
+              <a:srgbClr val="EEF3F8"/>
+            </a:solidFill>
+            <a:prstDash val="solid"/>
+          </a:ln>
+        </p:spPr>
+      </p:sp>
+      <p:sp>
+        <p:nvSpPr>
+          <p:cNvPr id="53" name="Text 51"/>
+          <p:cNvSpPr txBox="1"/>
+          <p:nvPr/>
+        </p:nvSpPr>
+        <p:spPr>
+          <a:xfrm>
+            <a:off x="16093440" y="8823960"/>
+            <a:ext cx="3977640" cy="1687982"/>
+          </a:xfrm>
+          <a:prstGeom prst="rect">
+            <a:avLst/>
+          </a:prstGeom>
+          <a:noFill/>
+          <a:ln/>
+        </p:spPr>
+        <p:txBody>
+          <a:bodyPr wrap="square" lIns="1270" tIns="1270" rIns="1270" bIns="1270" rtlCol="0" anchor="ctr"/>
+          <a:lstStyle/>
+          <a:p>
+            <a:pPr algn="ctr" indent="0" marL="0">
+              <a:buNone/>
+            </a:pPr>
+            <a:r>
+              <a:rPr lang="en-US" sz="6000" b="1" dirty="0">
+                <a:solidFill>
+                  <a:srgbClr val="EB6834"/>
                 </a:solidFill>
                 <a:latin typeface="Cambria" pitchFamily="34" charset="0"/>
                 <a:ea typeface="Cambria" pitchFamily="34" charset="-122"/>
                 <a:cs typeface="Cambria" pitchFamily="34" charset="-120"/>
               </a:rPr>
-              <a:t>4. Key formulations (new)</a:t>
-            </a:r>
-            <a:endParaRPr lang="en-US" sz="4000" dirty="0"/>
-          </a:p>
-        </p:txBody>
-      </p:sp>
-      <p:sp>
-        <p:nvSpPr>
-          <p:cNvPr id="14" name="Shape 11"/>
-          <p:cNvSpPr/>
-          <p:nvPr/>
-        </p:nvSpPr>
-        <p:spPr>
-          <a:xfrm>
-            <a:off x="822960" y="24589601"/>
-            <a:ext cx="9509760" cy="3931920"/>
-          </a:xfrm>
-          <a:prstGeom prst="roundRect">
-            <a:avLst>
-              <a:gd name="adj" fmla="val 4651"/>
-            </a:avLst>
-          </a:prstGeom>
-          <a:solidFill>
-            <a:srgbClr val="EEF3F8"/>
+              <a:t>12%</a:t>
+            </a:r>
+            <a:endParaRPr lang="en-US" sz="6000" dirty="0"/>
+          </a:p>
+        </p:txBody>
+      </p:sp>
+      <p:sp>
+        <p:nvSpPr>
+          <p:cNvPr id="54" name="Text 52"/>
+          <p:cNvSpPr txBox="1"/>
+          <p:nvPr/>
+        </p:nvSpPr>
+        <p:spPr>
+          <a:xfrm>
+            <a:off x="16139160" y="10458907"/>
+            <a:ext cx="3886200" cy="1363370"/>
+          </a:xfrm>
+          <a:prstGeom prst="rect">
+            <a:avLst/>
+          </a:prstGeom>
+          <a:noFill/>
+          <a:ln/>
+        </p:spPr>
+        <p:txBody>
+          <a:bodyPr wrap="square" lIns="1270" tIns="1270" rIns="1270" bIns="1270" rtlCol="0" anchor="t"/>
+          <a:lstStyle/>
+          <a:p>
+            <a:pPr algn="ctr" indent="0" marL="0">
+              <a:buNone/>
+            </a:pPr>
+            <a:r>
+              <a:rPr lang="en-US" sz="2100" dirty="0">
+                <a:solidFill>
+                  <a:srgbClr val="52514E"/>
+                </a:solidFill>
+                <a:latin typeface="Calibri" pitchFamily="34" charset="0"/>
+                <a:ea typeface="Calibri" pitchFamily="34" charset="-122"/>
+                <a:cs typeface="Calibri" pitchFamily="34" charset="-120"/>
+              </a:rPr>
+              <a:t>of all IA-1 runs end infeasible</a:t>
+            </a:r>
+            <a:endParaRPr lang="en-US" sz="2100" dirty="0"/>
+          </a:p>
+        </p:txBody>
+      </p:sp>
+      <p:sp>
+        <p:nvSpPr>
+          <p:cNvPr id="55" name="Shape 53"/>
+          <p:cNvSpPr/>
+          <p:nvPr/>
+        </p:nvSpPr>
+        <p:spPr>
+          <a:xfrm>
+            <a:off x="822960" y="12298680"/>
+            <a:ext cx="777240" cy="777240"/>
+          </a:xfrm>
+          <a:prstGeom prst="ellipse">
+            <a:avLst/>
+          </a:prstGeom>
+          <a:solidFill>
+            <a:srgbClr val="16324F"/>
           </a:solidFill>
           <a:ln w="12700">
             <a:solidFill>
-              <a:srgbClr val="EEF3F8"/>
-            </a:solidFill>
-            <a:prstDash val="solid"/>
-          </a:ln>
-        </p:spPr>
-      </p:sp>
-      <p:sp>
-        <p:nvSpPr>
-          <p:cNvPr id="15" name="Text 12"/>
-          <p:cNvSpPr txBox="1"/>
-          <p:nvPr/>
-        </p:nvSpPr>
-        <p:spPr>
-          <a:xfrm>
-            <a:off x="1097280" y="24726761"/>
-            <a:ext cx="8961120" cy="3749040"/>
-          </a:xfrm>
-          <a:prstGeom prst="rect">
-            <a:avLst/>
-          </a:prstGeom>
-          <a:noFill/>
-          <a:ln/>
-        </p:spPr>
-        <p:txBody>
-          <a:bodyPr wrap="square" lIns="1270" tIns="1270" rIns="1270" bIns="1270" rtlCol="0" anchor="t"/>
+              <a:srgbClr val="16324F"/>
+            </a:solidFill>
+            <a:prstDash val="solid"/>
+          </a:ln>
+        </p:spPr>
+      </p:sp>
+      <p:sp>
+        <p:nvSpPr>
+          <p:cNvPr id="56" name="Text 54"/>
+          <p:cNvSpPr txBox="1"/>
+          <p:nvPr/>
+        </p:nvSpPr>
+        <p:spPr>
+          <a:xfrm>
+            <a:off x="822960" y="12298680"/>
+            <a:ext cx="777240" cy="777240"/>
+          </a:xfrm>
+          <a:prstGeom prst="rect">
+            <a:avLst/>
+          </a:prstGeom>
+          <a:noFill/>
+          <a:ln/>
+        </p:spPr>
+        <p:txBody>
+          <a:bodyPr wrap="square" lIns="0" tIns="0" rIns="0" bIns="0" rtlCol="0" anchor="ctr"/>
+          <a:lstStyle/>
+          <a:p>
+            <a:pPr algn="ctr" indent="0" marL="0">
+              <a:buNone/>
+            </a:pPr>
+            <a:r>
+              <a:rPr lang="en-US" sz="3000" b="1" dirty="0">
+                <a:solidFill>
+                  <a:srgbClr val="FFFFFF"/>
+                </a:solidFill>
+                <a:latin typeface="Calibri" pitchFamily="34" charset="0"/>
+                <a:ea typeface="Calibri" pitchFamily="34" charset="-122"/>
+                <a:cs typeface="Calibri" pitchFamily="34" charset="-120"/>
+              </a:rPr>
+              <a:t>3</a:t>
+            </a:r>
+            <a:endParaRPr lang="en-US" sz="3000" dirty="0"/>
+          </a:p>
+        </p:txBody>
+      </p:sp>
+      <p:sp>
+        <p:nvSpPr>
+          <p:cNvPr id="57" name="Text 55"/>
+          <p:cNvSpPr txBox="1"/>
+          <p:nvPr/>
+        </p:nvSpPr>
+        <p:spPr>
+          <a:xfrm>
+            <a:off x="1783080" y="12252960"/>
+            <a:ext cx="18790920" cy="868680"/>
+          </a:xfrm>
+          <a:prstGeom prst="rect">
+            <a:avLst/>
+          </a:prstGeom>
+          <a:noFill/>
+          <a:ln/>
+        </p:spPr>
+        <p:txBody>
+          <a:bodyPr wrap="square" lIns="1270" tIns="1270" rIns="1270" bIns="1270" rtlCol="0" anchor="ctr"/>
           <a:lstStyle/>
           <a:p>
             <a:pPr indent="0" marL="0">
-              <a:spcAft>
-                <a:spcPts val="800"/>
-              </a:spcAft>
-              <a:buNone/>
-            </a:pPr>
-            <a:r>
-              <a:rPr lang="en-US" sz="2100" b="1" dirty="0">
-                <a:solidFill>
-                  <a:srgbClr val="1B2433"/>
-                </a:solidFill>
-                <a:latin typeface="Calibri" pitchFamily="34" charset="0"/>
-                <a:ea typeface="Calibri" pitchFamily="34" charset="-122"/>
-                <a:cs typeface="Calibri" pitchFamily="34" charset="-120"/>
-              </a:rPr>
-              <a:t>Diet relaxation  </a:t>
-            </a:r>
-            <a:pPr indent="0" marL="0">
-              <a:spcAft>
-                <a:spcPts val="800"/>
-              </a:spcAft>
-              <a:buNone/>
-            </a:pPr>
-            <a:r>
-              <a:rPr lang="en-US" sz="2100" dirty="0">
-                <a:solidFill>
-                  <a:srgbClr val="1B2433"/>
+              <a:buNone/>
+            </a:pPr>
+            <a:r>
+              <a:rPr lang="en-US" sz="4000" b="1" dirty="0">
+                <a:solidFill>
+                  <a:srgbClr val="16324F"/>
                 </a:solidFill>
                 <a:latin typeface="Cambria" pitchFamily="34" charset="0"/>
                 <a:ea typeface="Cambria" pitchFamily="34" charset="-122"/>
                 <a:cs typeface="Cambria" pitchFamily="34" charset="-120"/>
               </a:rPr>
-              <a:t>c*_p = min Σ c_i w_pi  s.t. specs, Σ w = 1;  LB = Σ t_p c*_p ≤ f*</a:t>
-            </a:r>
-            <a:endParaRPr lang="en-US" sz="2100" dirty="0"/>
-          </a:p>
+              <a:t>Our idea (IA-2): restart smart, not random</a:t>
+            </a:r>
+            <a:endParaRPr lang="en-US" sz="4000" dirty="0"/>
+          </a:p>
+        </p:txBody>
+      </p:sp>
+      <p:sp>
+        <p:nvSpPr>
+          <p:cNvPr id="58" name="Shape 56"/>
+          <p:cNvSpPr/>
+          <p:nvPr/>
+        </p:nvSpPr>
+        <p:spPr>
+          <a:xfrm>
+            <a:off x="822960" y="13304520"/>
+            <a:ext cx="6400800" cy="4206240"/>
+          </a:xfrm>
+          <a:prstGeom prst="roundRect">
+            <a:avLst>
+              <a:gd name="adj" fmla="val 5435"/>
+            </a:avLst>
+          </a:prstGeom>
+          <a:solidFill>
+            <a:srgbClr val="EEF3F8"/>
+          </a:solidFill>
+          <a:ln w="12700">
+            <a:solidFill>
+              <a:srgbClr val="EEF3F8"/>
+            </a:solidFill>
+            <a:prstDash val="solid"/>
+          </a:ln>
+        </p:spPr>
+      </p:sp>
+      <p:sp>
+        <p:nvSpPr>
+          <p:cNvPr id="59" name="Shape 57"/>
+          <p:cNvSpPr/>
+          <p:nvPr/>
+        </p:nvSpPr>
+        <p:spPr>
+          <a:xfrm>
+            <a:off x="3520440" y="13578840"/>
+            <a:ext cx="1005840" cy="1005840"/>
+          </a:xfrm>
+          <a:prstGeom prst="ellipse">
+            <a:avLst/>
+          </a:prstGeom>
+          <a:solidFill>
+            <a:srgbClr val="2A78D6"/>
+          </a:solidFill>
+          <a:ln w="12700">
+            <a:solidFill>
+              <a:srgbClr val="2A78D6"/>
+            </a:solidFill>
+            <a:prstDash val="solid"/>
+          </a:ln>
+        </p:spPr>
+      </p:sp>
+      <p:sp>
+        <p:nvSpPr>
+          <p:cNvPr id="60" name="Text 58"/>
+          <p:cNvSpPr txBox="1"/>
+          <p:nvPr/>
+        </p:nvSpPr>
+        <p:spPr>
+          <a:xfrm>
+            <a:off x="3246120" y="13578840"/>
+            <a:ext cx="1554480" cy="1005840"/>
+          </a:xfrm>
+          <a:prstGeom prst="rect">
+            <a:avLst/>
+          </a:prstGeom>
+          <a:noFill/>
+          <a:ln/>
+        </p:spPr>
+        <p:txBody>
+          <a:bodyPr wrap="square" lIns="0" tIns="0" rIns="0" bIns="0" rtlCol="0" anchor="ctr"/>
+          <a:lstStyle/>
+          <a:p>
+            <a:pPr algn="ctr" indent="0" marL="0">
+              <a:buNone/>
+            </a:pPr>
+            <a:r>
+              <a:rPr lang="en-US" sz="3400" b="1" dirty="0">
+                <a:solidFill>
+                  <a:srgbClr val="FFFFFF"/>
+                </a:solidFill>
+                <a:latin typeface="Calibri" pitchFamily="34" charset="0"/>
+                <a:ea typeface="Calibri" pitchFamily="34" charset="-122"/>
+                <a:cs typeface="Calibri" pitchFamily="34" charset="-120"/>
+              </a:rPr>
+              <a:t>1</a:t>
+            </a:r>
+            <a:endParaRPr lang="en-US" sz="3400" dirty="0"/>
+          </a:p>
+        </p:txBody>
+      </p:sp>
+      <p:sp>
+        <p:nvSpPr>
+          <p:cNvPr id="61" name="Text 59"/>
+          <p:cNvSpPr txBox="1"/>
+          <p:nvPr/>
+        </p:nvSpPr>
+        <p:spPr>
+          <a:xfrm>
+            <a:off x="1097280" y="14721840"/>
+            <a:ext cx="5852160" cy="685800"/>
+          </a:xfrm>
+          <a:prstGeom prst="rect">
+            <a:avLst/>
+          </a:prstGeom>
+          <a:noFill/>
+          <a:ln/>
+        </p:spPr>
+        <p:txBody>
+          <a:bodyPr wrap="square" lIns="1270" tIns="1270" rIns="1270" bIns="1270" rtlCol="0" anchor="t"/>
+          <a:lstStyle/>
+          <a:p>
+            <a:pPr algn="ctr" indent="0" marL="0">
+              <a:buNone/>
+            </a:pPr>
+            <a:r>
+              <a:rPr lang="en-US" sz="3000" b="1" dirty="0">
+                <a:solidFill>
+                  <a:srgbClr val="16324F"/>
+                </a:solidFill>
+                <a:latin typeface="Calibri" pitchFamily="34" charset="0"/>
+                <a:ea typeface="Calibri" pitchFamily="34" charset="-122"/>
+                <a:cs typeface="Calibri" pitchFamily="34" charset="-120"/>
+              </a:rPr>
+              <a:t>Smart start</a:t>
+            </a:r>
+            <a:endParaRPr lang="en-US" sz="3000" dirty="0"/>
+          </a:p>
+        </p:txBody>
+      </p:sp>
+      <p:sp>
+        <p:nvSpPr>
+          <p:cNvPr id="62" name="Text 60"/>
+          <p:cNvSpPr txBox="1"/>
+          <p:nvPr/>
+        </p:nvSpPr>
+        <p:spPr>
+          <a:xfrm>
+            <a:off x="1143000" y="15453360"/>
+            <a:ext cx="5760720" cy="1920240"/>
+          </a:xfrm>
+          <a:prstGeom prst="rect">
+            <a:avLst/>
+          </a:prstGeom>
+          <a:noFill/>
+          <a:ln/>
+        </p:spPr>
+        <p:txBody>
+          <a:bodyPr wrap="square" lIns="1270" tIns="1270" rIns="1270" bIns="1270" rtlCol="0" anchor="t"/>
+          <a:lstStyle/>
+          <a:p>
+            <a:pPr algn="ctr" indent="0" marL="0">
+              <a:buNone/>
+            </a:pPr>
+            <a:r>
+              <a:rPr lang="en-US" sz="2200" dirty="0">
+                <a:solidFill>
+                  <a:srgbClr val="52514E"/>
+                </a:solidFill>
+                <a:latin typeface="Calibri" pitchFamily="34" charset="0"/>
+                <a:ea typeface="Calibri" pitchFamily="34" charset="-122"/>
+                <a:cs typeface="Calibri" pitchFamily="34" charset="-120"/>
+              </a:rPr>
+              <a:t>Compute each feed's ideal recipe (a small LP) and group similar recipes into the bins.</a:t>
+            </a:r>
+            <a:endParaRPr lang="en-US" sz="2200" dirty="0"/>
+          </a:p>
+        </p:txBody>
+      </p:sp>
+      <p:sp>
+        <p:nvSpPr>
+          <p:cNvPr id="63" name="Shape 61"/>
+          <p:cNvSpPr/>
+          <p:nvPr/>
+        </p:nvSpPr>
+        <p:spPr>
+          <a:xfrm>
+            <a:off x="7498080" y="13304520"/>
+            <a:ext cx="6400800" cy="4206240"/>
+          </a:xfrm>
+          <a:prstGeom prst="roundRect">
+            <a:avLst>
+              <a:gd name="adj" fmla="val 5435"/>
+            </a:avLst>
+          </a:prstGeom>
+          <a:solidFill>
+            <a:srgbClr val="EEF3F8"/>
+          </a:solidFill>
+          <a:ln w="12700">
+            <a:solidFill>
+              <a:srgbClr val="EEF3F8"/>
+            </a:solidFill>
+            <a:prstDash val="solid"/>
+          </a:ln>
+        </p:spPr>
+      </p:sp>
+      <p:sp>
+        <p:nvSpPr>
+          <p:cNvPr id="64" name="Shape 62"/>
+          <p:cNvSpPr/>
+          <p:nvPr/>
+        </p:nvSpPr>
+        <p:spPr>
+          <a:xfrm>
+            <a:off x="10195560" y="13578840"/>
+            <a:ext cx="1005840" cy="1005840"/>
+          </a:xfrm>
+          <a:prstGeom prst="ellipse">
+            <a:avLst/>
+          </a:prstGeom>
+          <a:solidFill>
+            <a:srgbClr val="1BAF7A"/>
+          </a:solidFill>
+          <a:ln w="12700">
+            <a:solidFill>
+              <a:srgbClr val="1BAF7A"/>
+            </a:solidFill>
+            <a:prstDash val="solid"/>
+          </a:ln>
+        </p:spPr>
+      </p:sp>
+      <p:sp>
+        <p:nvSpPr>
+          <p:cNvPr id="65" name="Text 63"/>
+          <p:cNvSpPr txBox="1"/>
+          <p:nvPr/>
+        </p:nvSpPr>
+        <p:spPr>
+          <a:xfrm>
+            <a:off x="9921240" y="13578840"/>
+            <a:ext cx="1554480" cy="1005840"/>
+          </a:xfrm>
+          <a:prstGeom prst="rect">
+            <a:avLst/>
+          </a:prstGeom>
+          <a:noFill/>
+          <a:ln/>
+        </p:spPr>
+        <p:txBody>
+          <a:bodyPr wrap="square" lIns="0" tIns="0" rIns="0" bIns="0" rtlCol="0" anchor="ctr"/>
+          <a:lstStyle/>
+          <a:p>
+            <a:pPr algn="ctr" indent="0" marL="0">
+              <a:buNone/>
+            </a:pPr>
+            <a:r>
+              <a:rPr lang="en-US" sz="3400" b="1" dirty="0">
+                <a:solidFill>
+                  <a:srgbClr val="FFFFFF"/>
+                </a:solidFill>
+                <a:latin typeface="Calibri" pitchFamily="34" charset="0"/>
+                <a:ea typeface="Calibri" pitchFamily="34" charset="-122"/>
+                <a:cs typeface="Calibri" pitchFamily="34" charset="-120"/>
+              </a:rPr>
+              <a:t>2</a:t>
+            </a:r>
+            <a:endParaRPr lang="en-US" sz="3400" dirty="0"/>
+          </a:p>
+        </p:txBody>
+      </p:sp>
+      <p:sp>
+        <p:nvSpPr>
+          <p:cNvPr id="66" name="Text 64"/>
+          <p:cNvSpPr txBox="1"/>
+          <p:nvPr/>
+        </p:nvSpPr>
+        <p:spPr>
+          <a:xfrm>
+            <a:off x="7772400" y="14721840"/>
+            <a:ext cx="5852160" cy="685800"/>
+          </a:xfrm>
+          <a:prstGeom prst="rect">
+            <a:avLst/>
+          </a:prstGeom>
+          <a:noFill/>
+          <a:ln/>
+        </p:spPr>
+        <p:txBody>
+          <a:bodyPr wrap="square" lIns="1270" tIns="1270" rIns="1270" bIns="1270" rtlCol="0" anchor="t"/>
+          <a:lstStyle/>
+          <a:p>
+            <a:pPr algn="ctr" indent="0" marL="0">
+              <a:buNone/>
+            </a:pPr>
+            <a:r>
+              <a:rPr lang="en-US" sz="3000" b="1" dirty="0">
+                <a:solidFill>
+                  <a:srgbClr val="16324F"/>
+                </a:solidFill>
+                <a:latin typeface="Calibri" pitchFamily="34" charset="0"/>
+                <a:ea typeface="Calibri" pitchFamily="34" charset="-122"/>
+                <a:cs typeface="Calibri" pitchFamily="34" charset="-120"/>
+              </a:rPr>
+              <a:t>Fix one, solve the other</a:t>
+            </a:r>
+            <a:endParaRPr lang="en-US" sz="3000" dirty="0"/>
+          </a:p>
+        </p:txBody>
+      </p:sp>
+      <p:sp>
+        <p:nvSpPr>
+          <p:cNvPr id="67" name="Text 65"/>
+          <p:cNvSpPr txBox="1"/>
+          <p:nvPr/>
+        </p:nvSpPr>
+        <p:spPr>
+          <a:xfrm>
+            <a:off x="7818120" y="15453360"/>
+            <a:ext cx="5760720" cy="1920240"/>
+          </a:xfrm>
+          <a:prstGeom prst="rect">
+            <a:avLst/>
+          </a:prstGeom>
+          <a:noFill/>
+          <a:ln/>
+        </p:spPr>
+        <p:txBody>
+          <a:bodyPr wrap="square" lIns="1270" tIns="1270" rIns="1270" bIns="1270" rtlCol="0" anchor="t"/>
+          <a:lstStyle/>
+          <a:p>
+            <a:pPr algn="ctr" indent="0" marL="0">
+              <a:buNone/>
+            </a:pPr>
+            <a:r>
+              <a:rPr lang="en-US" sz="2200" dirty="0">
+                <a:solidFill>
+                  <a:srgbClr val="52514E"/>
+                </a:solidFill>
+                <a:latin typeface="Calibri" pitchFamily="34" charset="0"/>
+                <a:ea typeface="Calibri" pitchFamily="34" charset="-122"/>
+                <a:cs typeface="Calibri" pitchFamily="34" charset="-120"/>
+              </a:rPr>
+              <a:t>With the bins fixed the rest is an easy LP: it repairs and polishes every answer.</a:t>
+            </a:r>
+            <a:endParaRPr lang="en-US" sz="2200" dirty="0"/>
+          </a:p>
+        </p:txBody>
+      </p:sp>
+      <p:sp>
+        <p:nvSpPr>
+          <p:cNvPr id="68" name="Shape 66"/>
+          <p:cNvSpPr/>
+          <p:nvPr/>
+        </p:nvSpPr>
+        <p:spPr>
+          <a:xfrm>
+            <a:off x="14173200" y="13304520"/>
+            <a:ext cx="6400800" cy="4206240"/>
+          </a:xfrm>
+          <a:prstGeom prst="roundRect">
+            <a:avLst>
+              <a:gd name="adj" fmla="val 5435"/>
+            </a:avLst>
+          </a:prstGeom>
+          <a:solidFill>
+            <a:srgbClr val="EEF3F8"/>
+          </a:solidFill>
+          <a:ln w="12700">
+            <a:solidFill>
+              <a:srgbClr val="EEF3F8"/>
+            </a:solidFill>
+            <a:prstDash val="solid"/>
+          </a:ln>
+        </p:spPr>
+      </p:sp>
+      <p:sp>
+        <p:nvSpPr>
+          <p:cNvPr id="69" name="Shape 67"/>
+          <p:cNvSpPr/>
+          <p:nvPr/>
+        </p:nvSpPr>
+        <p:spPr>
+          <a:xfrm>
+            <a:off x="16870680" y="13578840"/>
+            <a:ext cx="1005840" cy="1005840"/>
+          </a:xfrm>
+          <a:prstGeom prst="ellipse">
+            <a:avLst/>
+          </a:prstGeom>
+          <a:solidFill>
+            <a:srgbClr val="6250D6"/>
+          </a:solidFill>
+          <a:ln w="12700">
+            <a:solidFill>
+              <a:srgbClr val="6250D6"/>
+            </a:solidFill>
+            <a:prstDash val="solid"/>
+          </a:ln>
+        </p:spPr>
+      </p:sp>
+      <p:sp>
+        <p:nvSpPr>
+          <p:cNvPr id="70" name="Text 68"/>
+          <p:cNvSpPr txBox="1"/>
+          <p:nvPr/>
+        </p:nvSpPr>
+        <p:spPr>
+          <a:xfrm>
+            <a:off x="16596360" y="13578840"/>
+            <a:ext cx="1554480" cy="1005840"/>
+          </a:xfrm>
+          <a:prstGeom prst="rect">
+            <a:avLst/>
+          </a:prstGeom>
+          <a:noFill/>
+          <a:ln/>
+        </p:spPr>
+        <p:txBody>
+          <a:bodyPr wrap="square" lIns="0" tIns="0" rIns="0" bIns="0" rtlCol="0" anchor="ctr"/>
+          <a:lstStyle/>
+          <a:p>
+            <a:pPr algn="ctr" indent="0" marL="0">
+              <a:buNone/>
+            </a:pPr>
+            <a:r>
+              <a:rPr lang="en-US" sz="3400" b="1" dirty="0">
+                <a:solidFill>
+                  <a:srgbClr val="FFFFFF"/>
+                </a:solidFill>
+                <a:latin typeface="Calibri" pitchFamily="34" charset="0"/>
+                <a:ea typeface="Calibri" pitchFamily="34" charset="-122"/>
+                <a:cs typeface="Calibri" pitchFamily="34" charset="-120"/>
+              </a:rPr>
+              <a:t>3</a:t>
+            </a:r>
+            <a:endParaRPr lang="en-US" sz="3400" dirty="0"/>
+          </a:p>
+        </p:txBody>
+      </p:sp>
+      <p:sp>
+        <p:nvSpPr>
+          <p:cNvPr id="71" name="Text 69"/>
+          <p:cNvSpPr txBox="1"/>
+          <p:nvPr/>
+        </p:nvSpPr>
+        <p:spPr>
+          <a:xfrm>
+            <a:off x="14447520" y="14721840"/>
+            <a:ext cx="5852160" cy="685800"/>
+          </a:xfrm>
+          <a:prstGeom prst="rect">
+            <a:avLst/>
+          </a:prstGeom>
+          <a:noFill/>
+          <a:ln/>
+        </p:spPr>
+        <p:txBody>
+          <a:bodyPr wrap="square" lIns="1270" tIns="1270" rIns="1270" bIns="1270" rtlCol="0" anchor="t"/>
+          <a:lstStyle/>
+          <a:p>
+            <a:pPr algn="ctr" indent="0" marL="0">
+              <a:buNone/>
+            </a:pPr>
+            <a:r>
+              <a:rPr lang="en-US" sz="3000" b="1" dirty="0">
+                <a:solidFill>
+                  <a:srgbClr val="16324F"/>
+                </a:solidFill>
+                <a:latin typeface="Calibri" pitchFamily="34" charset="0"/>
+                <a:ea typeface="Calibri" pitchFamily="34" charset="-122"/>
+                <a:cs typeface="Calibri" pitchFamily="34" charset="-120"/>
+              </a:rPr>
+              <a:t>Learn from the best</a:t>
+            </a:r>
+            <a:endParaRPr lang="en-US" sz="3000" dirty="0"/>
+          </a:p>
+        </p:txBody>
+      </p:sp>
+      <p:sp>
+        <p:nvSpPr>
+          <p:cNvPr id="72" name="Text 70"/>
+          <p:cNvSpPr txBox="1"/>
+          <p:nvPr/>
+        </p:nvSpPr>
+        <p:spPr>
+          <a:xfrm>
+            <a:off x="14493240" y="15453360"/>
+            <a:ext cx="5760720" cy="1920240"/>
+          </a:xfrm>
+          <a:prstGeom prst="rect">
+            <a:avLst/>
+          </a:prstGeom>
+          <a:noFill/>
+          <a:ln/>
+        </p:spPr>
+        <p:txBody>
+          <a:bodyPr wrap="square" lIns="1270" tIns="1270" rIns="1270" bIns="1270" rtlCol="0" anchor="t"/>
+          <a:lstStyle/>
+          <a:p>
+            <a:pPr algn="ctr" indent="0" marL="0">
+              <a:buNone/>
+            </a:pPr>
+            <a:r>
+              <a:rPr lang="en-US" sz="2200" dirty="0">
+                <a:solidFill>
+                  <a:srgbClr val="52514E"/>
+                </a:solidFill>
+                <a:latin typeface="Calibri" pitchFamily="34" charset="0"/>
+                <a:ea typeface="Calibri" pitchFamily="34" charset="-122"/>
+                <a:cs typeface="Calibri" pitchFamily="34" charset="-120"/>
+              </a:rPr>
+              <a:t>Each new run starts from the best answer so far and changes the bin that hurts one feed most.</a:t>
+            </a:r>
+            <a:endParaRPr lang="en-US" sz="2200" dirty="0"/>
+          </a:p>
+        </p:txBody>
+      </p:sp>
+      <p:sp>
+        <p:nvSpPr>
+          <p:cNvPr id="73" name="Text 71"/>
+          <p:cNvSpPr txBox="1"/>
+          <p:nvPr/>
+        </p:nvSpPr>
+        <p:spPr>
+          <a:xfrm>
+            <a:off x="822960" y="17647920"/>
+            <a:ext cx="19751040" cy="822960"/>
+          </a:xfrm>
+          <a:prstGeom prst="rect">
+            <a:avLst/>
+          </a:prstGeom>
+          <a:noFill/>
+          <a:ln/>
+        </p:spPr>
+        <p:txBody>
+          <a:bodyPr wrap="square" lIns="1270" tIns="1270" rIns="1270" bIns="1270" rtlCol="0" anchor="t"/>
+          <a:lstStyle/>
+          <a:p>
+            <a:pPr algn="ctr" indent="0" marL="0">
+              <a:buNone/>
+            </a:pPr>
+            <a:r>
+              <a:rPr lang="en-US" sz="2200" b="1" dirty="0">
+                <a:solidFill>
+                  <a:srgbClr val="2A78D6"/>
+                </a:solidFill>
+                <a:latin typeface="Calibri" pitchFamily="34" charset="0"/>
+                <a:ea typeface="Calibri" pitchFamily="34" charset="-122"/>
+                <a:cs typeface="Calibri" pitchFamily="34" charset="-120"/>
+              </a:rPr>
+              <a:t>The model and the SLP solver from IA-1 stay unchanged. Check on af-1 (our IA-1 instance): IA-1 and IA-2 are both Good in 100% of runs, and IA-2's lower bound (295.93 = BARON's) proves the cost 296.446 is within 0.17% of the optimum.</a:t>
+            </a:r>
+            <a:endParaRPr lang="en-US" sz="2200" dirty="0"/>
+          </a:p>
+        </p:txBody>
+      </p:sp>
+      <p:sp>
+        <p:nvSpPr>
+          <p:cNvPr id="74" name="Shape 72"/>
+          <p:cNvSpPr/>
+          <p:nvPr/>
+        </p:nvSpPr>
+        <p:spPr>
+          <a:xfrm>
+            <a:off x="822960" y="18653760"/>
+            <a:ext cx="777240" cy="777240"/>
+          </a:xfrm>
+          <a:prstGeom prst="ellipse">
+            <a:avLst/>
+          </a:prstGeom>
+          <a:solidFill>
+            <a:srgbClr val="16324F"/>
+          </a:solidFill>
+          <a:ln w="12700">
+            <a:solidFill>
+              <a:srgbClr val="16324F"/>
+            </a:solidFill>
+            <a:prstDash val="solid"/>
+          </a:ln>
+        </p:spPr>
+      </p:sp>
+      <p:sp>
+        <p:nvSpPr>
+          <p:cNvPr id="75" name="Text 73"/>
+          <p:cNvSpPr txBox="1"/>
+          <p:nvPr/>
+        </p:nvSpPr>
+        <p:spPr>
+          <a:xfrm>
+            <a:off x="822960" y="18653760"/>
+            <a:ext cx="777240" cy="777240"/>
+          </a:xfrm>
+          <a:prstGeom prst="rect">
+            <a:avLst/>
+          </a:prstGeom>
+          <a:noFill/>
+          <a:ln/>
+        </p:spPr>
+        <p:txBody>
+          <a:bodyPr wrap="square" lIns="0" tIns="0" rIns="0" bIns="0" rtlCol="0" anchor="ctr"/>
+          <a:lstStyle/>
+          <a:p>
+            <a:pPr algn="ctr" indent="0" marL="0">
+              <a:buNone/>
+            </a:pPr>
+            <a:r>
+              <a:rPr lang="en-US" sz="3000" b="1" dirty="0">
+                <a:solidFill>
+                  <a:srgbClr val="FFFFFF"/>
+                </a:solidFill>
+                <a:latin typeface="Calibri" pitchFamily="34" charset="0"/>
+                <a:ea typeface="Calibri" pitchFamily="34" charset="-122"/>
+                <a:cs typeface="Calibri" pitchFamily="34" charset="-120"/>
+              </a:rPr>
+              <a:t>4</a:t>
+            </a:r>
+            <a:endParaRPr lang="en-US" sz="3000" dirty="0"/>
+          </a:p>
+        </p:txBody>
+      </p:sp>
+      <p:sp>
+        <p:nvSpPr>
+          <p:cNvPr id="76" name="Text 74"/>
+          <p:cNvSpPr txBox="1"/>
+          <p:nvPr/>
+        </p:nvSpPr>
+        <p:spPr>
+          <a:xfrm>
+            <a:off x="1783080" y="18608040"/>
+            <a:ext cx="18790920" cy="868680"/>
+          </a:xfrm>
+          <a:prstGeom prst="rect">
+            <a:avLst/>
+          </a:prstGeom>
+          <a:noFill/>
+          <a:ln/>
+        </p:spPr>
+        <p:txBody>
+          <a:bodyPr wrap="square" lIns="1270" tIns="1270" rIns="1270" bIns="1270" rtlCol="0" anchor="ctr"/>
+          <a:lstStyle/>
           <a:p>
             <a:pPr indent="0" marL="0">
-              <a:spcAft>
-                <a:spcPts val="800"/>
-              </a:spcAft>
-              <a:buNone/>
-            </a:pPr>
-            <a:r>
-              <a:rPr lang="en-US" sz="2100" b="1" dirty="0">
-                <a:solidFill>
-                  <a:srgbClr val="1B2433"/>
-                </a:solidFill>
-                <a:latin typeface="Calibri" pitchFamily="34" charset="0"/>
-                <a:ea typeface="Calibri" pitchFamily="34" charset="-122"/>
-                <a:cs typeface="Calibri" pitchFamily="34" charset="-120"/>
-              </a:rPr>
-              <a:t>Product LP  </a:t>
-            </a:r>
-            <a:pPr indent="0" marL="0">
-              <a:spcAft>
-                <a:spcPts val="800"/>
-              </a:spcAft>
-              <a:buNone/>
-            </a:pPr>
-            <a:r>
-              <a:rPr lang="en-US" sz="2100" dirty="0">
-                <a:solidFill>
-                  <a:srgbClr val="1B2433"/>
+              <a:buNone/>
+            </a:pPr>
+            <a:r>
+              <a:rPr lang="en-US" sz="4000" b="1" dirty="0">
+                <a:solidFill>
+                  <a:srgbClr val="16324F"/>
                 </a:solidFill>
                 <a:latin typeface="Cambria" pitchFamily="34" charset="0"/>
                 <a:ea typeface="Cambria" pitchFamily="34" charset="-122"/>
                 <a:cs typeface="Cambria" pitchFamily="34" charset="-120"/>
               </a:rPr>
-              <a:t>bins λ fixed ⇒ (5c),(5g) linear in μ  → exact feasibility</a:t>
-            </a:r>
-            <a:endParaRPr lang="en-US" sz="2100" dirty="0"/>
-          </a:p>
+              <a:t>How IA-2 runs (20 runs per instance)</a:t>
+            </a:r>
+            <a:endParaRPr lang="en-US" sz="4000" dirty="0"/>
+          </a:p>
+        </p:txBody>
+      </p:sp>
+      <p:sp>
+        <p:nvSpPr>
+          <p:cNvPr id="77" name="Shape 75"/>
+          <p:cNvSpPr/>
+          <p:nvPr/>
+        </p:nvSpPr>
+        <p:spPr>
+          <a:xfrm>
+            <a:off x="822960" y="19705320"/>
+            <a:ext cx="2926080" cy="2103120"/>
+          </a:xfrm>
+          <a:prstGeom prst="roundRect">
+            <a:avLst>
+              <a:gd name="adj" fmla="val 10870"/>
+            </a:avLst>
+          </a:prstGeom>
+          <a:solidFill>
+            <a:srgbClr val="EEF3F8"/>
+          </a:solidFill>
+          <a:ln w="12700">
+            <a:solidFill>
+              <a:srgbClr val="EEF3F8"/>
+            </a:solidFill>
+            <a:prstDash val="solid"/>
+          </a:ln>
+        </p:spPr>
+      </p:sp>
+      <p:sp>
+        <p:nvSpPr>
+          <p:cNvPr id="78" name="Shape 76"/>
+          <p:cNvSpPr/>
+          <p:nvPr/>
+        </p:nvSpPr>
+        <p:spPr>
+          <a:xfrm>
+            <a:off x="822960" y="19705320"/>
+            <a:ext cx="2926080" cy="146304"/>
+          </a:xfrm>
+          <a:prstGeom prst="rect">
+            <a:avLst/>
+          </a:prstGeom>
+          <a:solidFill>
+            <a:srgbClr val="2A78D6"/>
+          </a:solidFill>
+          <a:ln w="12700">
+            <a:solidFill>
+              <a:srgbClr val="2A78D6"/>
+            </a:solidFill>
+            <a:prstDash val="solid"/>
+          </a:ln>
+        </p:spPr>
+      </p:sp>
+      <p:sp>
+        <p:nvSpPr>
+          <p:cNvPr id="79" name="Text 77"/>
+          <p:cNvSpPr txBox="1"/>
+          <p:nvPr/>
+        </p:nvSpPr>
+        <p:spPr>
+          <a:xfrm>
+            <a:off x="914400" y="19979640"/>
+            <a:ext cx="2743200" cy="640080"/>
+          </a:xfrm>
+          <a:prstGeom prst="rect">
+            <a:avLst/>
+          </a:prstGeom>
+          <a:noFill/>
+          <a:ln/>
+        </p:spPr>
+        <p:txBody>
+          <a:bodyPr wrap="square" lIns="1270" tIns="1270" rIns="1270" bIns="1270" rtlCol="0" anchor="t"/>
+          <a:lstStyle/>
+          <a:p>
+            <a:pPr algn="ctr" indent="0" marL="0">
+              <a:buNone/>
+            </a:pPr>
+            <a:r>
+              <a:rPr lang="en-US" sz="2500" b="1" dirty="0">
+                <a:solidFill>
+                  <a:srgbClr val="16324F"/>
+                </a:solidFill>
+                <a:latin typeface="Calibri" pitchFamily="34" charset="0"/>
+                <a:ea typeface="Calibri" pitchFamily="34" charset="-122"/>
+                <a:cs typeface="Calibri" pitchFamily="34" charset="-120"/>
+              </a:rPr>
+              <a:t>Ideal recipes</a:t>
+            </a:r>
+            <a:endParaRPr lang="en-US" sz="2500" dirty="0"/>
+          </a:p>
+        </p:txBody>
+      </p:sp>
+      <p:sp>
+        <p:nvSpPr>
+          <p:cNvPr id="80" name="Text 78"/>
+          <p:cNvSpPr txBox="1"/>
+          <p:nvPr/>
+        </p:nvSpPr>
+        <p:spPr>
+          <a:xfrm>
+            <a:off x="914400" y="20665440"/>
+            <a:ext cx="2743200" cy="822960"/>
+          </a:xfrm>
+          <a:prstGeom prst="rect">
+            <a:avLst/>
+          </a:prstGeom>
+          <a:noFill/>
+          <a:ln/>
+        </p:spPr>
+        <p:txBody>
+          <a:bodyPr wrap="square" lIns="1270" tIns="1270" rIns="1270" bIns="1270" rtlCol="0" anchor="t"/>
+          <a:lstStyle/>
+          <a:p>
+            <a:pPr algn="ctr" indent="0" marL="0">
+              <a:buNone/>
+            </a:pPr>
+            <a:r>
+              <a:rPr lang="en-US" sz="2000" dirty="0">
+                <a:solidFill>
+                  <a:srgbClr val="52514E"/>
+                </a:solidFill>
+                <a:latin typeface="Calibri" pitchFamily="34" charset="0"/>
+                <a:ea typeface="Calibri" pitchFamily="34" charset="-122"/>
+                <a:cs typeface="Calibri" pitchFamily="34" charset="-120"/>
+              </a:rPr>
+              <a:t>LP per feed</a:t>
+            </a:r>
+            <a:endParaRPr lang="en-US" sz="2000" dirty="0"/>
+          </a:p>
+        </p:txBody>
+      </p:sp>
+      <p:sp>
+        <p:nvSpPr>
+          <p:cNvPr id="81" name="Shape 79"/>
+          <p:cNvSpPr/>
+          <p:nvPr/>
+        </p:nvSpPr>
+        <p:spPr>
+          <a:xfrm>
+            <a:off x="3776472" y="20756880"/>
+            <a:ext cx="338328" cy="0"/>
+          </a:xfrm>
+          <a:prstGeom prst="line">
+            <a:avLst/>
+          </a:prstGeom>
+          <a:noFill/>
+          <a:ln w="38100">
+            <a:solidFill>
+              <a:srgbClr val="8A8984"/>
+            </a:solidFill>
+            <a:prstDash val="solid"/>
+            <a:tailEnd type="triangle"/>
+          </a:ln>
+        </p:spPr>
+      </p:sp>
+      <p:sp>
+        <p:nvSpPr>
+          <p:cNvPr id="82" name="Shape 80"/>
+          <p:cNvSpPr/>
+          <p:nvPr/>
+        </p:nvSpPr>
+        <p:spPr>
+          <a:xfrm>
+            <a:off x="4133088" y="19705320"/>
+            <a:ext cx="2926080" cy="2103120"/>
+          </a:xfrm>
+          <a:prstGeom prst="roundRect">
+            <a:avLst>
+              <a:gd name="adj" fmla="val 10870"/>
+            </a:avLst>
+          </a:prstGeom>
+          <a:solidFill>
+            <a:srgbClr val="EEF3F8"/>
+          </a:solidFill>
+          <a:ln w="12700">
+            <a:solidFill>
+              <a:srgbClr val="EEF3F8"/>
+            </a:solidFill>
+            <a:prstDash val="solid"/>
+          </a:ln>
+        </p:spPr>
+      </p:sp>
+      <p:sp>
+        <p:nvSpPr>
+          <p:cNvPr id="83" name="Shape 81"/>
+          <p:cNvSpPr/>
+          <p:nvPr/>
+        </p:nvSpPr>
+        <p:spPr>
+          <a:xfrm>
+            <a:off x="4133088" y="19705320"/>
+            <a:ext cx="2926080" cy="146304"/>
+          </a:xfrm>
+          <a:prstGeom prst="rect">
+            <a:avLst/>
+          </a:prstGeom>
+          <a:solidFill>
+            <a:srgbClr val="2A78D6"/>
+          </a:solidFill>
+          <a:ln w="12700">
+            <a:solidFill>
+              <a:srgbClr val="2A78D6"/>
+            </a:solidFill>
+            <a:prstDash val="solid"/>
+          </a:ln>
+        </p:spPr>
+      </p:sp>
+      <p:sp>
+        <p:nvSpPr>
+          <p:cNvPr id="84" name="Text 82"/>
+          <p:cNvSpPr txBox="1"/>
+          <p:nvPr/>
+        </p:nvSpPr>
+        <p:spPr>
+          <a:xfrm>
+            <a:off x="4224528" y="19979640"/>
+            <a:ext cx="2743200" cy="640080"/>
+          </a:xfrm>
+          <a:prstGeom prst="rect">
+            <a:avLst/>
+          </a:prstGeom>
+          <a:noFill/>
+          <a:ln/>
+        </p:spPr>
+        <p:txBody>
+          <a:bodyPr wrap="square" lIns="1270" tIns="1270" rIns="1270" bIns="1270" rtlCol="0" anchor="t"/>
+          <a:lstStyle/>
+          <a:p>
+            <a:pPr algn="ctr" indent="0" marL="0">
+              <a:buNone/>
+            </a:pPr>
+            <a:r>
+              <a:rPr lang="en-US" sz="2500" b="1" dirty="0">
+                <a:solidFill>
+                  <a:srgbClr val="16324F"/>
+                </a:solidFill>
+                <a:latin typeface="Calibri" pitchFamily="34" charset="0"/>
+                <a:ea typeface="Calibri" pitchFamily="34" charset="-122"/>
+                <a:cs typeface="Calibri" pitchFamily="34" charset="-120"/>
+              </a:rPr>
+              <a:t>Smart start</a:t>
+            </a:r>
+            <a:endParaRPr lang="en-US" sz="2500" dirty="0"/>
+          </a:p>
+        </p:txBody>
+      </p:sp>
+      <p:sp>
+        <p:nvSpPr>
+          <p:cNvPr id="85" name="Text 83"/>
+          <p:cNvSpPr txBox="1"/>
+          <p:nvPr/>
+        </p:nvSpPr>
+        <p:spPr>
+          <a:xfrm>
+            <a:off x="4224528" y="20665440"/>
+            <a:ext cx="2743200" cy="822960"/>
+          </a:xfrm>
+          <a:prstGeom prst="rect">
+            <a:avLst/>
+          </a:prstGeom>
+          <a:noFill/>
+          <a:ln/>
+        </p:spPr>
+        <p:txBody>
+          <a:bodyPr wrap="square" lIns="1270" tIns="1270" rIns="1270" bIns="1270" rtlCol="0" anchor="t"/>
+          <a:lstStyle/>
+          <a:p>
+            <a:pPr algn="ctr" indent="0" marL="0">
+              <a:buNone/>
+            </a:pPr>
+            <a:r>
+              <a:rPr lang="en-US" sz="2000" dirty="0">
+                <a:solidFill>
+                  <a:srgbClr val="52514E"/>
+                </a:solidFill>
+                <a:latin typeface="Calibri" pitchFamily="34" charset="0"/>
+                <a:ea typeface="Calibri" pitchFamily="34" charset="-122"/>
+                <a:cs typeface="Calibri" pitchFamily="34" charset="-120"/>
+              </a:rPr>
+              <a:t>recipes → bins</a:t>
+            </a:r>
+            <a:endParaRPr lang="en-US" sz="2000" dirty="0"/>
+          </a:p>
+        </p:txBody>
+      </p:sp>
+      <p:sp>
+        <p:nvSpPr>
+          <p:cNvPr id="86" name="Shape 84"/>
+          <p:cNvSpPr/>
+          <p:nvPr/>
+        </p:nvSpPr>
+        <p:spPr>
+          <a:xfrm>
+            <a:off x="7086600" y="20756880"/>
+            <a:ext cx="338328" cy="0"/>
+          </a:xfrm>
+          <a:prstGeom prst="line">
+            <a:avLst/>
+          </a:prstGeom>
+          <a:noFill/>
+          <a:ln w="38100">
+            <a:solidFill>
+              <a:srgbClr val="8A8984"/>
+            </a:solidFill>
+            <a:prstDash val="solid"/>
+            <a:tailEnd type="triangle"/>
+          </a:ln>
+        </p:spPr>
+      </p:sp>
+      <p:sp>
+        <p:nvSpPr>
+          <p:cNvPr id="87" name="Shape 85"/>
+          <p:cNvSpPr/>
+          <p:nvPr/>
+        </p:nvSpPr>
+        <p:spPr>
+          <a:xfrm>
+            <a:off x="7443216" y="19705320"/>
+            <a:ext cx="2926080" cy="2103120"/>
+          </a:xfrm>
+          <a:prstGeom prst="roundRect">
+            <a:avLst>
+              <a:gd name="adj" fmla="val 10870"/>
+            </a:avLst>
+          </a:prstGeom>
+          <a:solidFill>
+            <a:srgbClr val="EEF3F8"/>
+          </a:solidFill>
+          <a:ln w="12700">
+            <a:solidFill>
+              <a:srgbClr val="EEF3F8"/>
+            </a:solidFill>
+            <a:prstDash val="solid"/>
+          </a:ln>
+        </p:spPr>
+      </p:sp>
+      <p:sp>
+        <p:nvSpPr>
+          <p:cNvPr id="88" name="Shape 86"/>
+          <p:cNvSpPr/>
+          <p:nvPr/>
+        </p:nvSpPr>
+        <p:spPr>
+          <a:xfrm>
+            <a:off x="7443216" y="19705320"/>
+            <a:ext cx="2926080" cy="146304"/>
+          </a:xfrm>
+          <a:prstGeom prst="rect">
+            <a:avLst/>
+          </a:prstGeom>
+          <a:solidFill>
+            <a:srgbClr val="9AA9BC"/>
+          </a:solidFill>
+          <a:ln w="12700">
+            <a:solidFill>
+              <a:srgbClr val="9AA9BC"/>
+            </a:solidFill>
+            <a:prstDash val="solid"/>
+          </a:ln>
+        </p:spPr>
+      </p:sp>
+      <p:sp>
+        <p:nvSpPr>
+          <p:cNvPr id="89" name="Text 87"/>
+          <p:cNvSpPr txBox="1"/>
+          <p:nvPr/>
+        </p:nvSpPr>
+        <p:spPr>
+          <a:xfrm>
+            <a:off x="7534656" y="19979640"/>
+            <a:ext cx="2743200" cy="640080"/>
+          </a:xfrm>
+          <a:prstGeom prst="rect">
+            <a:avLst/>
+          </a:prstGeom>
+          <a:noFill/>
+          <a:ln/>
+        </p:spPr>
+        <p:txBody>
+          <a:bodyPr wrap="square" lIns="1270" tIns="1270" rIns="1270" bIns="1270" rtlCol="0" anchor="t"/>
+          <a:lstStyle/>
+          <a:p>
+            <a:pPr algn="ctr" indent="0" marL="0">
+              <a:buNone/>
+            </a:pPr>
+            <a:r>
+              <a:rPr lang="en-US" sz="2500" b="1" dirty="0">
+                <a:solidFill>
+                  <a:srgbClr val="16324F"/>
+                </a:solidFill>
+                <a:latin typeface="Calibri" pitchFamily="34" charset="0"/>
+                <a:ea typeface="Calibri" pitchFamily="34" charset="-122"/>
+                <a:cs typeface="Calibri" pitchFamily="34" charset="-120"/>
+              </a:rPr>
+              <a:t>SLP</a:t>
+            </a:r>
+            <a:endParaRPr lang="en-US" sz="2500" dirty="0"/>
+          </a:p>
+        </p:txBody>
+      </p:sp>
+      <p:sp>
+        <p:nvSpPr>
+          <p:cNvPr id="90" name="Text 88"/>
+          <p:cNvSpPr txBox="1"/>
+          <p:nvPr/>
+        </p:nvSpPr>
+        <p:spPr>
+          <a:xfrm>
+            <a:off x="7534656" y="20665440"/>
+            <a:ext cx="2743200" cy="822960"/>
+          </a:xfrm>
+          <a:prstGeom prst="rect">
+            <a:avLst/>
+          </a:prstGeom>
+          <a:noFill/>
+          <a:ln/>
+        </p:spPr>
+        <p:txBody>
+          <a:bodyPr wrap="square" lIns="1270" tIns="1270" rIns="1270" bIns="1270" rtlCol="0" anchor="t"/>
+          <a:lstStyle/>
+          <a:p>
+            <a:pPr algn="ctr" indent="0" marL="0">
+              <a:buNone/>
+            </a:pPr>
+            <a:r>
+              <a:rPr lang="en-US" sz="2000" dirty="0">
+                <a:solidFill>
+                  <a:srgbClr val="52514E"/>
+                </a:solidFill>
+                <a:latin typeface="Calibri" pitchFamily="34" charset="0"/>
+                <a:ea typeface="Calibri" pitchFamily="34" charset="-122"/>
+                <a:cs typeface="Calibri" pitchFamily="34" charset="-120"/>
+              </a:rPr>
+              <a:t>same as IA-1</a:t>
+            </a:r>
+            <a:endParaRPr lang="en-US" sz="2000" dirty="0"/>
+          </a:p>
+        </p:txBody>
+      </p:sp>
+      <p:sp>
+        <p:nvSpPr>
+          <p:cNvPr id="91" name="Shape 89"/>
+          <p:cNvSpPr/>
+          <p:nvPr/>
+        </p:nvSpPr>
+        <p:spPr>
+          <a:xfrm>
+            <a:off x="10396728" y="20756880"/>
+            <a:ext cx="338328" cy="0"/>
+          </a:xfrm>
+          <a:prstGeom prst="line">
+            <a:avLst/>
+          </a:prstGeom>
+          <a:noFill/>
+          <a:ln w="38100">
+            <a:solidFill>
+              <a:srgbClr val="8A8984"/>
+            </a:solidFill>
+            <a:prstDash val="solid"/>
+            <a:tailEnd type="triangle"/>
+          </a:ln>
+        </p:spPr>
+      </p:sp>
+      <p:sp>
+        <p:nvSpPr>
+          <p:cNvPr id="92" name="Shape 90"/>
+          <p:cNvSpPr/>
+          <p:nvPr/>
+        </p:nvSpPr>
+        <p:spPr>
+          <a:xfrm>
+            <a:off x="10753344" y="19705320"/>
+            <a:ext cx="2926080" cy="2103120"/>
+          </a:xfrm>
+          <a:prstGeom prst="roundRect">
+            <a:avLst>
+              <a:gd name="adj" fmla="val 10870"/>
+            </a:avLst>
+          </a:prstGeom>
+          <a:solidFill>
+            <a:srgbClr val="EEF3F8"/>
+          </a:solidFill>
+          <a:ln w="12700">
+            <a:solidFill>
+              <a:srgbClr val="EEF3F8"/>
+            </a:solidFill>
+            <a:prstDash val="solid"/>
+          </a:ln>
+        </p:spPr>
+      </p:sp>
+      <p:sp>
+        <p:nvSpPr>
+          <p:cNvPr id="93" name="Shape 91"/>
+          <p:cNvSpPr/>
+          <p:nvPr/>
+        </p:nvSpPr>
+        <p:spPr>
+          <a:xfrm>
+            <a:off x="10753344" y="19705320"/>
+            <a:ext cx="2926080" cy="146304"/>
+          </a:xfrm>
+          <a:prstGeom prst="rect">
+            <a:avLst/>
+          </a:prstGeom>
+          <a:solidFill>
+            <a:srgbClr val="1BAF7A"/>
+          </a:solidFill>
+          <a:ln w="12700">
+            <a:solidFill>
+              <a:srgbClr val="1BAF7A"/>
+            </a:solidFill>
+            <a:prstDash val="solid"/>
+          </a:ln>
+        </p:spPr>
+      </p:sp>
+      <p:sp>
+        <p:nvSpPr>
+          <p:cNvPr id="94" name="Text 92"/>
+          <p:cNvSpPr txBox="1"/>
+          <p:nvPr/>
+        </p:nvSpPr>
+        <p:spPr>
+          <a:xfrm>
+            <a:off x="10844784" y="19979640"/>
+            <a:ext cx="2743200" cy="640080"/>
+          </a:xfrm>
+          <a:prstGeom prst="rect">
+            <a:avLst/>
+          </a:prstGeom>
+          <a:noFill/>
+          <a:ln/>
+        </p:spPr>
+        <p:txBody>
+          <a:bodyPr wrap="square" lIns="1270" tIns="1270" rIns="1270" bIns="1270" rtlCol="0" anchor="t"/>
+          <a:lstStyle/>
+          <a:p>
+            <a:pPr algn="ctr" indent="0" marL="0">
+              <a:buNone/>
+            </a:pPr>
+            <a:r>
+              <a:rPr lang="en-US" sz="2500" b="1" dirty="0">
+                <a:solidFill>
+                  <a:srgbClr val="16324F"/>
+                </a:solidFill>
+                <a:latin typeface="Calibri" pitchFamily="34" charset="0"/>
+                <a:ea typeface="Calibri" pitchFamily="34" charset="-122"/>
+                <a:cs typeface="Calibri" pitchFamily="34" charset="-120"/>
+              </a:rPr>
+              <a:t>Polish</a:t>
+            </a:r>
+            <a:endParaRPr lang="en-US" sz="2500" dirty="0"/>
+          </a:p>
+        </p:txBody>
+      </p:sp>
+      <p:sp>
+        <p:nvSpPr>
+          <p:cNvPr id="95" name="Text 93"/>
+          <p:cNvSpPr txBox="1"/>
+          <p:nvPr/>
+        </p:nvSpPr>
+        <p:spPr>
+          <a:xfrm>
+            <a:off x="10844784" y="20665440"/>
+            <a:ext cx="2743200" cy="822960"/>
+          </a:xfrm>
+          <a:prstGeom prst="rect">
+            <a:avLst/>
+          </a:prstGeom>
+          <a:noFill/>
+          <a:ln/>
+        </p:spPr>
+        <p:txBody>
+          <a:bodyPr wrap="square" lIns="1270" tIns="1270" rIns="1270" bIns="1270" rtlCol="0" anchor="t"/>
+          <a:lstStyle/>
+          <a:p>
+            <a:pPr algn="ctr" indent="0" marL="0">
+              <a:buNone/>
+            </a:pPr>
+            <a:r>
+              <a:rPr lang="en-US" sz="2000" dirty="0">
+                <a:solidFill>
+                  <a:srgbClr val="52514E"/>
+                </a:solidFill>
+                <a:latin typeface="Calibri" pitchFamily="34" charset="0"/>
+                <a:ea typeface="Calibri" pitchFamily="34" charset="-122"/>
+                <a:cs typeface="Calibri" pitchFamily="34" charset="-120"/>
+              </a:rPr>
+              <a:t>two exact LPs</a:t>
+            </a:r>
+            <a:endParaRPr lang="en-US" sz="2000" dirty="0"/>
+          </a:p>
+        </p:txBody>
+      </p:sp>
+      <p:sp>
+        <p:nvSpPr>
+          <p:cNvPr id="96" name="Shape 94"/>
+          <p:cNvSpPr/>
+          <p:nvPr/>
+        </p:nvSpPr>
+        <p:spPr>
+          <a:xfrm>
+            <a:off x="13706856" y="20756880"/>
+            <a:ext cx="338328" cy="0"/>
+          </a:xfrm>
+          <a:prstGeom prst="line">
+            <a:avLst/>
+          </a:prstGeom>
+          <a:noFill/>
+          <a:ln w="38100">
+            <a:solidFill>
+              <a:srgbClr val="8A8984"/>
+            </a:solidFill>
+            <a:prstDash val="solid"/>
+            <a:tailEnd type="triangle"/>
+          </a:ln>
+        </p:spPr>
+      </p:sp>
+      <p:sp>
+        <p:nvSpPr>
+          <p:cNvPr id="97" name="Shape 95"/>
+          <p:cNvSpPr/>
+          <p:nvPr/>
+        </p:nvSpPr>
+        <p:spPr>
+          <a:xfrm>
+            <a:off x="14063472" y="19705320"/>
+            <a:ext cx="2926080" cy="2103120"/>
+          </a:xfrm>
+          <a:prstGeom prst="roundRect">
+            <a:avLst>
+              <a:gd name="adj" fmla="val 10870"/>
+            </a:avLst>
+          </a:prstGeom>
+          <a:solidFill>
+            <a:srgbClr val="EEF3F8"/>
+          </a:solidFill>
+          <a:ln w="12700">
+            <a:solidFill>
+              <a:srgbClr val="EEF3F8"/>
+            </a:solidFill>
+            <a:prstDash val="solid"/>
+          </a:ln>
+        </p:spPr>
+      </p:sp>
+      <p:sp>
+        <p:nvSpPr>
+          <p:cNvPr id="98" name="Shape 96"/>
+          <p:cNvSpPr/>
+          <p:nvPr/>
+        </p:nvSpPr>
+        <p:spPr>
+          <a:xfrm>
+            <a:off x="14063472" y="19705320"/>
+            <a:ext cx="2926080" cy="146304"/>
+          </a:xfrm>
+          <a:prstGeom prst="rect">
+            <a:avLst/>
+          </a:prstGeom>
+          <a:solidFill>
+            <a:srgbClr val="16324F"/>
+          </a:solidFill>
+          <a:ln w="12700">
+            <a:solidFill>
+              <a:srgbClr val="16324F"/>
+            </a:solidFill>
+            <a:prstDash val="solid"/>
+          </a:ln>
+        </p:spPr>
+      </p:sp>
+      <p:sp>
+        <p:nvSpPr>
+          <p:cNvPr id="99" name="Text 97"/>
+          <p:cNvSpPr txBox="1"/>
+          <p:nvPr/>
+        </p:nvSpPr>
+        <p:spPr>
+          <a:xfrm>
+            <a:off x="14154912" y="19979640"/>
+            <a:ext cx="2743200" cy="640080"/>
+          </a:xfrm>
+          <a:prstGeom prst="rect">
+            <a:avLst/>
+          </a:prstGeom>
+          <a:noFill/>
+          <a:ln/>
+        </p:spPr>
+        <p:txBody>
+          <a:bodyPr wrap="square" lIns="1270" tIns="1270" rIns="1270" bIns="1270" rtlCol="0" anchor="t"/>
+          <a:lstStyle/>
+          <a:p>
+            <a:pPr algn="ctr" indent="0" marL="0">
+              <a:buNone/>
+            </a:pPr>
+            <a:r>
+              <a:rPr lang="en-US" sz="2500" b="1" dirty="0">
+                <a:solidFill>
+                  <a:srgbClr val="16324F"/>
+                </a:solidFill>
+                <a:latin typeface="Calibri" pitchFamily="34" charset="0"/>
+                <a:ea typeface="Calibri" pitchFamily="34" charset="-122"/>
+                <a:cs typeface="Calibri" pitchFamily="34" charset="-120"/>
+              </a:rPr>
+              <a:t>Best so far</a:t>
+            </a:r>
+            <a:endParaRPr lang="en-US" sz="2500" dirty="0"/>
+          </a:p>
+        </p:txBody>
+      </p:sp>
+      <p:sp>
+        <p:nvSpPr>
+          <p:cNvPr id="100" name="Text 98"/>
+          <p:cNvSpPr txBox="1"/>
+          <p:nvPr/>
+        </p:nvSpPr>
+        <p:spPr>
+          <a:xfrm>
+            <a:off x="14154912" y="20665440"/>
+            <a:ext cx="2743200" cy="822960"/>
+          </a:xfrm>
+          <a:prstGeom prst="rect">
+            <a:avLst/>
+          </a:prstGeom>
+          <a:noFill/>
+          <a:ln/>
+        </p:spPr>
+        <p:txBody>
+          <a:bodyPr wrap="square" lIns="1270" tIns="1270" rIns="1270" bIns="1270" rtlCol="0" anchor="t"/>
+          <a:lstStyle/>
+          <a:p>
+            <a:pPr algn="ctr" indent="0" marL="0">
+              <a:buNone/>
+            </a:pPr>
+            <a:r>
+              <a:rPr lang="en-US" sz="2000" dirty="0">
+                <a:solidFill>
+                  <a:srgbClr val="52514E"/>
+                </a:solidFill>
+                <a:latin typeface="Calibri" pitchFamily="34" charset="0"/>
+                <a:ea typeface="Calibri" pitchFamily="34" charset="-122"/>
+                <a:cs typeface="Calibri" pitchFamily="34" charset="-120"/>
+              </a:rPr>
+              <a:t>cheapest valid</a:t>
+            </a:r>
+            <a:endParaRPr lang="en-US" sz="2000" dirty="0"/>
+          </a:p>
+        </p:txBody>
+      </p:sp>
+      <p:sp>
+        <p:nvSpPr>
+          <p:cNvPr id="101" name="Shape 99"/>
+          <p:cNvSpPr/>
+          <p:nvPr/>
+        </p:nvSpPr>
+        <p:spPr>
+          <a:xfrm>
+            <a:off x="17016984" y="20756880"/>
+            <a:ext cx="338328" cy="0"/>
+          </a:xfrm>
+          <a:prstGeom prst="line">
+            <a:avLst/>
+          </a:prstGeom>
+          <a:noFill/>
+          <a:ln w="38100">
+            <a:solidFill>
+              <a:srgbClr val="8A8984"/>
+            </a:solidFill>
+            <a:prstDash val="solid"/>
+            <a:tailEnd type="triangle"/>
+          </a:ln>
+        </p:spPr>
+      </p:sp>
+      <p:sp>
+        <p:nvSpPr>
+          <p:cNvPr id="102" name="Shape 100"/>
+          <p:cNvSpPr/>
+          <p:nvPr/>
+        </p:nvSpPr>
+        <p:spPr>
+          <a:xfrm>
+            <a:off x="17373600" y="19705320"/>
+            <a:ext cx="2926080" cy="2103120"/>
+          </a:xfrm>
+          <a:prstGeom prst="roundRect">
+            <a:avLst>
+              <a:gd name="adj" fmla="val 10870"/>
+            </a:avLst>
+          </a:prstGeom>
+          <a:solidFill>
+            <a:srgbClr val="EEF3F8"/>
+          </a:solidFill>
+          <a:ln w="12700">
+            <a:solidFill>
+              <a:srgbClr val="EEF3F8"/>
+            </a:solidFill>
+            <a:prstDash val="solid"/>
+          </a:ln>
+        </p:spPr>
+      </p:sp>
+      <p:sp>
+        <p:nvSpPr>
+          <p:cNvPr id="103" name="Shape 101"/>
+          <p:cNvSpPr/>
+          <p:nvPr/>
+        </p:nvSpPr>
+        <p:spPr>
+          <a:xfrm>
+            <a:off x="17373600" y="19705320"/>
+            <a:ext cx="2926080" cy="146304"/>
+          </a:xfrm>
+          <a:prstGeom prst="rect">
+            <a:avLst/>
+          </a:prstGeom>
+          <a:solidFill>
+            <a:srgbClr val="6250D6"/>
+          </a:solidFill>
+          <a:ln w="12700">
+            <a:solidFill>
+              <a:srgbClr val="6250D6"/>
+            </a:solidFill>
+            <a:prstDash val="solid"/>
+          </a:ln>
+        </p:spPr>
+      </p:sp>
+      <p:sp>
+        <p:nvSpPr>
+          <p:cNvPr id="104" name="Text 102"/>
+          <p:cNvSpPr txBox="1"/>
+          <p:nvPr/>
+        </p:nvSpPr>
+        <p:spPr>
+          <a:xfrm>
+            <a:off x="17465040" y="19979640"/>
+            <a:ext cx="2743200" cy="640080"/>
+          </a:xfrm>
+          <a:prstGeom prst="rect">
+            <a:avLst/>
+          </a:prstGeom>
+          <a:noFill/>
+          <a:ln/>
+        </p:spPr>
+        <p:txBody>
+          <a:bodyPr wrap="square" lIns="1270" tIns="1270" rIns="1270" bIns="1270" rtlCol="0" anchor="t"/>
+          <a:lstStyle/>
+          <a:p>
+            <a:pPr algn="ctr" indent="0" marL="0">
+              <a:buNone/>
+            </a:pPr>
+            <a:r>
+              <a:rPr lang="en-US" sz="2500" b="1" dirty="0">
+                <a:solidFill>
+                  <a:srgbClr val="16324F"/>
+                </a:solidFill>
+                <a:latin typeface="Calibri" pitchFamily="34" charset="0"/>
+                <a:ea typeface="Calibri" pitchFamily="34" charset="-122"/>
+                <a:cs typeface="Calibri" pitchFamily="34" charset="-120"/>
+              </a:rPr>
+              <a:t>Learn &amp; change</a:t>
+            </a:r>
+            <a:endParaRPr lang="en-US" sz="2500" dirty="0"/>
+          </a:p>
+        </p:txBody>
+      </p:sp>
+      <p:sp>
+        <p:nvSpPr>
+          <p:cNvPr id="105" name="Text 103"/>
+          <p:cNvSpPr txBox="1"/>
+          <p:nvPr/>
+        </p:nvSpPr>
+        <p:spPr>
+          <a:xfrm>
+            <a:off x="17465040" y="20665440"/>
+            <a:ext cx="2743200" cy="822960"/>
+          </a:xfrm>
+          <a:prstGeom prst="rect">
+            <a:avLst/>
+          </a:prstGeom>
+          <a:noFill/>
+          <a:ln/>
+        </p:spPr>
+        <p:txBody>
+          <a:bodyPr wrap="square" lIns="1270" tIns="1270" rIns="1270" bIns="1270" rtlCol="0" anchor="t"/>
+          <a:lstStyle/>
+          <a:p>
+            <a:pPr algn="ctr" indent="0" marL="0">
+              <a:buNone/>
+            </a:pPr>
+            <a:r>
+              <a:rPr lang="en-US" sz="2000" dirty="0">
+                <a:solidFill>
+                  <a:srgbClr val="52514E"/>
+                </a:solidFill>
+                <a:latin typeface="Calibri" pitchFamily="34" charset="0"/>
+                <a:ea typeface="Calibri" pitchFamily="34" charset="-122"/>
+                <a:cs typeface="Calibri" pitchFamily="34" charset="-120"/>
+              </a:rPr>
+              <a:t>re-mix one bin</a:t>
+            </a:r>
+            <a:endParaRPr lang="en-US" sz="2000" dirty="0"/>
+          </a:p>
+        </p:txBody>
+      </p:sp>
+      <p:sp>
+        <p:nvSpPr>
+          <p:cNvPr id="106" name="Shape 104"/>
+          <p:cNvSpPr/>
+          <p:nvPr/>
+        </p:nvSpPr>
+        <p:spPr>
+          <a:xfrm>
+            <a:off x="18836640" y="21808440"/>
+            <a:ext cx="0" cy="502920"/>
+          </a:xfrm>
+          <a:prstGeom prst="line">
+            <a:avLst/>
+          </a:prstGeom>
+          <a:noFill/>
+          <a:ln w="38100">
+            <a:solidFill>
+              <a:srgbClr val="6250D6"/>
+            </a:solidFill>
+            <a:prstDash val="dash"/>
+          </a:ln>
+        </p:spPr>
+      </p:sp>
+      <p:sp>
+        <p:nvSpPr>
+          <p:cNvPr id="107" name="Shape 105"/>
+          <p:cNvSpPr/>
+          <p:nvPr/>
+        </p:nvSpPr>
+        <p:spPr>
+          <a:xfrm>
+            <a:off x="8906256" y="22311360"/>
+            <a:ext cx="9930384" cy="0"/>
+          </a:xfrm>
+          <a:prstGeom prst="line">
+            <a:avLst/>
+          </a:prstGeom>
+          <a:noFill/>
+          <a:ln w="38100">
+            <a:solidFill>
+              <a:srgbClr val="6250D6"/>
+            </a:solidFill>
+            <a:prstDash val="dash"/>
+          </a:ln>
+        </p:spPr>
+      </p:sp>
+      <p:sp>
+        <p:nvSpPr>
+          <p:cNvPr id="108" name="Shape 106"/>
+          <p:cNvSpPr/>
+          <p:nvPr/>
+        </p:nvSpPr>
+        <p:spPr>
+          <a:xfrm flipV="1">
+            <a:off x="8906256" y="21826728"/>
+            <a:ext cx="0" cy="484632"/>
+          </a:xfrm>
+          <a:prstGeom prst="line">
+            <a:avLst/>
+          </a:prstGeom>
+          <a:noFill/>
+          <a:ln w="38100">
+            <a:solidFill>
+              <a:srgbClr val="6250D6"/>
+            </a:solidFill>
+            <a:prstDash val="dash"/>
+            <a:tailEnd type="triangle"/>
+          </a:ln>
+        </p:spPr>
+      </p:sp>
+      <p:sp>
+        <p:nvSpPr>
+          <p:cNvPr id="109" name="Text 107"/>
+          <p:cNvSpPr txBox="1"/>
+          <p:nvPr/>
+        </p:nvSpPr>
+        <p:spPr>
+          <a:xfrm>
+            <a:off x="9180576" y="22311360"/>
+            <a:ext cx="9381744" cy="502920"/>
+          </a:xfrm>
+          <a:prstGeom prst="rect">
+            <a:avLst/>
+          </a:prstGeom>
+          <a:noFill/>
+          <a:ln/>
+        </p:spPr>
+        <p:txBody>
+          <a:bodyPr wrap="square" lIns="1270" tIns="1270" rIns="1270" bIns="1270" rtlCol="0" anchor="t"/>
+          <a:lstStyle/>
+          <a:p>
+            <a:pPr algn="ctr" indent="0" marL="0">
+              <a:buNone/>
+            </a:pPr>
+            <a:r>
+              <a:rPr lang="en-US" sz="2000" dirty="0">
+                <a:solidFill>
+                  <a:srgbClr val="6250D6"/>
+                </a:solidFill>
+                <a:latin typeface="Calibri" pitchFamily="34" charset="0"/>
+                <a:ea typeface="Calibri" pitchFamily="34" charset="-122"/>
+                <a:cs typeface="Calibri" pitchFamily="34" charset="-120"/>
+              </a:rPr>
+              <a:t>next run starts from the best answer</a:t>
+            </a:r>
+            <a:endParaRPr lang="en-US" sz="2000" dirty="0"/>
+          </a:p>
+        </p:txBody>
+      </p:sp>
+      <p:sp>
+        <p:nvSpPr>
+          <p:cNvPr id="110" name="Shape 108"/>
+          <p:cNvSpPr/>
+          <p:nvPr/>
+        </p:nvSpPr>
+        <p:spPr>
+          <a:xfrm>
+            <a:off x="822960" y="22860000"/>
+            <a:ext cx="777240" cy="777240"/>
+          </a:xfrm>
+          <a:prstGeom prst="ellipse">
+            <a:avLst/>
+          </a:prstGeom>
+          <a:solidFill>
+            <a:srgbClr val="16324F"/>
+          </a:solidFill>
+          <a:ln w="12700">
+            <a:solidFill>
+              <a:srgbClr val="16324F"/>
+            </a:solidFill>
+            <a:prstDash val="solid"/>
+          </a:ln>
+        </p:spPr>
+      </p:sp>
+      <p:sp>
+        <p:nvSpPr>
+          <p:cNvPr id="111" name="Text 109"/>
+          <p:cNvSpPr txBox="1"/>
+          <p:nvPr/>
+        </p:nvSpPr>
+        <p:spPr>
+          <a:xfrm>
+            <a:off x="822960" y="22860000"/>
+            <a:ext cx="777240" cy="777240"/>
+          </a:xfrm>
+          <a:prstGeom prst="rect">
+            <a:avLst/>
+          </a:prstGeom>
+          <a:noFill/>
+          <a:ln/>
+        </p:spPr>
+        <p:txBody>
+          <a:bodyPr wrap="square" lIns="0" tIns="0" rIns="0" bIns="0" rtlCol="0" anchor="ctr"/>
+          <a:lstStyle/>
+          <a:p>
+            <a:pPr algn="ctr" indent="0" marL="0">
+              <a:buNone/>
+            </a:pPr>
+            <a:r>
+              <a:rPr lang="en-US" sz="3000" b="1" dirty="0">
+                <a:solidFill>
+                  <a:srgbClr val="FFFFFF"/>
+                </a:solidFill>
+                <a:latin typeface="Calibri" pitchFamily="34" charset="0"/>
+                <a:ea typeface="Calibri" pitchFamily="34" charset="-122"/>
+                <a:cs typeface="Calibri" pitchFamily="34" charset="-120"/>
+              </a:rPr>
+              <a:t>5</a:t>
+            </a:r>
+            <a:endParaRPr lang="en-US" sz="3000" dirty="0"/>
+          </a:p>
+        </p:txBody>
+      </p:sp>
+      <p:sp>
+        <p:nvSpPr>
+          <p:cNvPr id="112" name="Text 110"/>
+          <p:cNvSpPr txBox="1"/>
+          <p:nvPr/>
+        </p:nvSpPr>
+        <p:spPr>
+          <a:xfrm>
+            <a:off x="1783080" y="22814280"/>
+            <a:ext cx="18790920" cy="868680"/>
+          </a:xfrm>
+          <a:prstGeom prst="rect">
+            <a:avLst/>
+          </a:prstGeom>
+          <a:noFill/>
+          <a:ln/>
+        </p:spPr>
+        <p:txBody>
+          <a:bodyPr wrap="square" lIns="1270" tIns="1270" rIns="1270" bIns="1270" rtlCol="0" anchor="ctr"/>
+          <a:lstStyle/>
           <a:p>
             <a:pPr indent="0" marL="0">
-              <a:spcAft>
-                <a:spcPts val="800"/>
-              </a:spcAft>
-              <a:buNone/>
-            </a:pPr>
-            <a:r>
-              <a:rPr lang="en-US" sz="2100" b="1" dirty="0">
-                <a:solidFill>
-                  <a:srgbClr val="1B2433"/>
-                </a:solidFill>
-                <a:latin typeface="Calibri" pitchFamily="34" charset="0"/>
-                <a:ea typeface="Calibri" pitchFamily="34" charset="-122"/>
-                <a:cs typeface="Calibri" pitchFamily="34" charset="-120"/>
-              </a:rPr>
-              <a:t>Bin LP  </a:t>
-            </a:r>
-            <a:pPr indent="0" marL="0">
-              <a:spcAft>
-                <a:spcPts val="800"/>
-              </a:spcAft>
-              <a:buNone/>
-            </a:pPr>
-            <a:r>
-              <a:rPr lang="en-US" sz="2100" dirty="0">
-                <a:solidFill>
-                  <a:srgbClr val="1B2433"/>
+              <a:buNone/>
+            </a:pPr>
+            <a:r>
+              <a:rPr lang="en-US" sz="4000" b="1" dirty="0">
+                <a:solidFill>
+                  <a:srgbClr val="16324F"/>
                 </a:solidFill>
                 <a:latin typeface="Cambria" pitchFamily="34" charset="0"/>
                 <a:ea typeface="Cambria" pitchFamily="34" charset="-122"/>
                 <a:cs typeface="Cambria" pitchFamily="34" charset="-120"/>
               </a:rPr>
-              <a:t>shares μ_pm fixed ⇒ d linear in (λ, μ^S)</a:t>
-            </a:r>
-            <a:endParaRPr lang="en-US" sz="2100" dirty="0"/>
-          </a:p>
-          <a:p>
-            <a:pPr indent="0" marL="0">
-              <a:spcAft>
-                <a:spcPts val="800"/>
-              </a:spcAft>
-              <a:buNone/>
-            </a:pPr>
-            <a:r>
-              <a:rPr lang="en-US" sz="2100" b="1" dirty="0">
-                <a:solidFill>
-                  <a:srgbClr val="1B2433"/>
-                </a:solidFill>
-                <a:latin typeface="Calibri" pitchFamily="34" charset="0"/>
-                <a:ea typeface="Calibri" pitchFamily="34" charset="-122"/>
-                <a:cs typeface="Calibri" pitchFamily="34" charset="-120"/>
-              </a:rPr>
-              <a:t>Regret  </a:t>
-            </a:r>
-            <a:pPr indent="0" marL="0">
-              <a:spcAft>
-                <a:spcPts val="800"/>
-              </a:spcAft>
-              <a:buNone/>
-            </a:pPr>
-            <a:r>
-              <a:rPr lang="en-US" sz="2100" dirty="0">
-                <a:solidFill>
-                  <a:srgbClr val="1B2433"/>
+              <a:t>Results: IA-1 vs IA-2 (11 instances, 3 × 20 runs each, same computer)</a:t>
+            </a:r>
+            <a:endParaRPr lang="en-US" sz="4000" dirty="0"/>
+          </a:p>
+        </p:txBody>
+      </p:sp>
+      <p:graphicFrame>
+        <p:nvGraphicFramePr>
+          <p:cNvPr id="113" name="Chart 0" descr=""/>
+          <p:cNvGraphicFramePr/>
+          <p:nvPr/>
+        </p:nvGraphicFramePr>
+        <p:xfrm>
+          <a:off x="822960" y="23865840"/>
+          <a:ext cx="7498080" cy="4343400"/>
+        </p:xfrm>
+        <a:graphic xmlns:a="http://schemas.openxmlformats.org/drawingml/2006/main">
+          <a:graphicData uri="http://schemas.openxmlformats.org/drawingml/2006/chart">
+            <c:chart xmlns:c="http://schemas.openxmlformats.org/drawingml/2006/chart" r:id="rId1"/>
+          </a:graphicData>
+        </a:graphic>
+      </p:graphicFrame>
+      <p:sp>
+        <p:nvSpPr>
+          <p:cNvPr id="114" name="Shape 111"/>
+          <p:cNvSpPr/>
+          <p:nvPr/>
+        </p:nvSpPr>
+        <p:spPr>
+          <a:xfrm>
+            <a:off x="8595360" y="23911560"/>
+            <a:ext cx="3840480" cy="2743200"/>
+          </a:xfrm>
+          <a:prstGeom prst="roundRect">
+            <a:avLst>
+              <a:gd name="adj" fmla="val 8333"/>
+            </a:avLst>
+          </a:prstGeom>
+          <a:solidFill>
+            <a:srgbClr val="EEF3F8"/>
+          </a:solidFill>
+          <a:ln w="12700">
+            <a:solidFill>
+              <a:srgbClr val="EEF3F8"/>
+            </a:solidFill>
+            <a:prstDash val="solid"/>
+          </a:ln>
+        </p:spPr>
+      </p:sp>
+      <p:sp>
+        <p:nvSpPr>
+          <p:cNvPr id="115" name="Text 112"/>
+          <p:cNvSpPr txBox="1"/>
+          <p:nvPr/>
+        </p:nvSpPr>
+        <p:spPr>
+          <a:xfrm>
+            <a:off x="8778240" y="24094440"/>
+            <a:ext cx="3474720" cy="1426464"/>
+          </a:xfrm>
+          <a:prstGeom prst="rect">
+            <a:avLst/>
+          </a:prstGeom>
+          <a:noFill/>
+          <a:ln/>
+        </p:spPr>
+        <p:txBody>
+          <a:bodyPr wrap="square" lIns="1270" tIns="1270" rIns="1270" bIns="1270" rtlCol="0" anchor="ctr"/>
+          <a:lstStyle/>
+          <a:p>
+            <a:pPr algn="ctr" indent="0" marL="0">
+              <a:buNone/>
+            </a:pPr>
+            <a:r>
+              <a:rPr lang="en-US" sz="6000" b="1" dirty="0">
+                <a:solidFill>
+                  <a:srgbClr val="2A78D6"/>
                 </a:solidFill>
                 <a:latin typeface="Cambria" pitchFamily="34" charset="0"/>
                 <a:ea typeface="Cambria" pitchFamily="34" charset="-122"/>
                 <a:cs typeface="Cambria" pitchFamily="34" charset="-120"/>
               </a:rPr>
-              <a:t>regret_p = t_p max(0, c^D_p − c*_p): re-seed a bin with a high-regret product's recipe; best of 4 by 10-iteration SLP probe</a:t>
+              <a:t>5×</a:t>
+            </a:r>
+            <a:endParaRPr lang="en-US" sz="6000" dirty="0"/>
+          </a:p>
+        </p:txBody>
+      </p:sp>
+      <p:sp>
+        <p:nvSpPr>
+          <p:cNvPr id="116" name="Text 113"/>
+          <p:cNvSpPr txBox="1"/>
+          <p:nvPr/>
+        </p:nvSpPr>
+        <p:spPr>
+          <a:xfrm>
+            <a:off x="8823960" y="25447752"/>
+            <a:ext cx="3383280" cy="1152144"/>
+          </a:xfrm>
+          <a:prstGeom prst="rect">
+            <a:avLst/>
+          </a:prstGeom>
+          <a:noFill/>
+          <a:ln/>
+        </p:spPr>
+        <p:txBody>
+          <a:bodyPr wrap="square" lIns="1270" tIns="1270" rIns="1270" bIns="1270" rtlCol="0" anchor="t"/>
+          <a:lstStyle/>
+          <a:p>
+            <a:pPr algn="ctr" indent="0" marL="0">
+              <a:buNone/>
+            </a:pPr>
+            <a:r>
+              <a:rPr lang="en-US" sz="2100" dirty="0">
+                <a:solidFill>
+                  <a:srgbClr val="52514E"/>
+                </a:solidFill>
+                <a:latin typeface="Calibri" pitchFamily="34" charset="0"/>
+                <a:ea typeface="Calibri" pitchFamily="34" charset="-122"/>
+                <a:cs typeface="Calibri" pitchFamily="34" charset="-120"/>
+              </a:rPr>
+              <a:t>faster to a Good answer (hard)</a:t>
             </a:r>
             <a:endParaRPr lang="en-US" sz="2100" dirty="0"/>
           </a:p>
@@ -1581,57 +4943,123 @@
       </p:sp>
       <p:sp>
         <p:nvSpPr>
-          <p:cNvPr id="16" name="Text 13"/>
-          <p:cNvSpPr txBox="1"/>
-          <p:nvPr/>
-        </p:nvSpPr>
-        <p:spPr>
-          <a:xfrm>
-            <a:off x="11055096" y="4937760"/>
-            <a:ext cx="9509760" cy="822960"/>
-          </a:xfrm>
-          <a:prstGeom prst="rect">
-            <a:avLst/>
-          </a:prstGeom>
-          <a:noFill/>
-          <a:ln/>
-        </p:spPr>
-        <p:txBody>
-          <a:bodyPr wrap="square" lIns="1270" tIns="1270" rIns="1270" bIns="1270" rtlCol="0" anchor="t"/>
-          <a:lstStyle/>
-          <a:p>
-            <a:pPr indent="0" marL="0">
-              <a:buNone/>
-            </a:pPr>
-            <a:r>
-              <a:rPr lang="en-US" sz="4000" b="1" dirty="0">
-                <a:solidFill>
-                  <a:srgbClr val="16324F"/>
+          <p:cNvPr id="117" name="Shape 114"/>
+          <p:cNvSpPr/>
+          <p:nvPr/>
+        </p:nvSpPr>
+        <p:spPr>
+          <a:xfrm>
+            <a:off x="12664440" y="23911560"/>
+            <a:ext cx="3840480" cy="2743200"/>
+          </a:xfrm>
+          <a:prstGeom prst="roundRect">
+            <a:avLst>
+              <a:gd name="adj" fmla="val 8333"/>
+            </a:avLst>
+          </a:prstGeom>
+          <a:solidFill>
+            <a:srgbClr val="EEF3F8"/>
+          </a:solidFill>
+          <a:ln w="12700">
+            <a:solidFill>
+              <a:srgbClr val="EEF3F8"/>
+            </a:solidFill>
+            <a:prstDash val="solid"/>
+          </a:ln>
+        </p:spPr>
+      </p:sp>
+      <p:sp>
+        <p:nvSpPr>
+          <p:cNvPr id="118" name="Text 115"/>
+          <p:cNvSpPr txBox="1"/>
+          <p:nvPr/>
+        </p:nvSpPr>
+        <p:spPr>
+          <a:xfrm>
+            <a:off x="12847320" y="24094440"/>
+            <a:ext cx="3474720" cy="1426464"/>
+          </a:xfrm>
+          <a:prstGeom prst="rect">
+            <a:avLst/>
+          </a:prstGeom>
+          <a:noFill/>
+          <a:ln/>
+        </p:spPr>
+        <p:txBody>
+          <a:bodyPr wrap="square" lIns="1270" tIns="1270" rIns="1270" bIns="1270" rtlCol="0" anchor="ctr"/>
+          <a:lstStyle/>
+          <a:p>
+            <a:pPr algn="ctr" indent="0" marL="0">
+              <a:buNone/>
+            </a:pPr>
+            <a:r>
+              <a:rPr lang="en-US" sz="4800" b="1" dirty="0">
+                <a:solidFill>
+                  <a:srgbClr val="2A78D6"/>
                 </a:solidFill>
                 <a:latin typeface="Cambria" pitchFamily="34" charset="0"/>
                 <a:ea typeface="Cambria" pitchFamily="34" charset="-122"/>
                 <a:cs typeface="Cambria" pitchFamily="34" charset="-120"/>
               </a:rPr>
-              <a:t>5. Results (11 instances, 3×20 runs)</a:t>
-            </a:r>
-            <a:endParaRPr lang="en-US" sz="4000" dirty="0"/>
-          </a:p>
-        </p:txBody>
-      </p:sp>
-      <p:sp>
-        <p:nvSpPr>
-          <p:cNvPr id="17" name="Shape 14"/>
-          <p:cNvSpPr/>
-          <p:nvPr/>
-        </p:nvSpPr>
-        <p:spPr>
-          <a:xfrm>
-            <a:off x="11055096" y="5852160"/>
-            <a:ext cx="2971800" cy="2286000"/>
+              <a:t>88→96%</a:t>
+            </a:r>
+            <a:endParaRPr lang="en-US" sz="4800" dirty="0"/>
+          </a:p>
+        </p:txBody>
+      </p:sp>
+      <p:sp>
+        <p:nvSpPr>
+          <p:cNvPr id="119" name="Text 116"/>
+          <p:cNvSpPr txBox="1"/>
+          <p:nvPr/>
+        </p:nvSpPr>
+        <p:spPr>
+          <a:xfrm>
+            <a:off x="12893040" y="25447752"/>
+            <a:ext cx="3383280" cy="1152144"/>
+          </a:xfrm>
+          <a:prstGeom prst="rect">
+            <a:avLst/>
+          </a:prstGeom>
+          <a:noFill/>
+          <a:ln/>
+        </p:spPr>
+        <p:txBody>
+          <a:bodyPr wrap="square" lIns="1270" tIns="1270" rIns="1270" bIns="1270" rtlCol="0" anchor="t"/>
+          <a:lstStyle/>
+          <a:p>
+            <a:pPr algn="ctr" indent="0" marL="0">
+              <a:buNone/>
+            </a:pPr>
+            <a:r>
+              <a:rPr lang="en-US" sz="2100" dirty="0">
+                <a:solidFill>
+                  <a:srgbClr val="52514E"/>
+                </a:solidFill>
+                <a:latin typeface="Calibri" pitchFamily="34" charset="0"/>
+                <a:ea typeface="Calibri" pitchFamily="34" charset="-122"/>
+                <a:cs typeface="Calibri" pitchFamily="34" charset="-120"/>
+              </a:rPr>
+              <a:t>feasible runs (all 11)</a:t>
+            </a:r>
+            <a:endParaRPr lang="en-US" sz="2100" dirty="0"/>
+          </a:p>
+        </p:txBody>
+      </p:sp>
+      <p:sp>
+        <p:nvSpPr>
+          <p:cNvPr id="120" name="Shape 117"/>
+          <p:cNvSpPr/>
+          <p:nvPr/>
+        </p:nvSpPr>
+        <p:spPr>
+          <a:xfrm>
+            <a:off x="16733520" y="23911560"/>
+            <a:ext cx="3840480" cy="2743200"/>
           </a:xfrm>
           <a:prstGeom prst="roundRect">
             <a:avLst>
-              <a:gd name="adj" fmla="val 8000"/>
+              <a:gd name="adj" fmla="val 8333"/>
             </a:avLst>
           </a:prstGeom>
           <a:solidFill>
@@ -1647,14 +5075,14 @@
       </p:sp>
       <p:sp>
         <p:nvSpPr>
-          <p:cNvPr id="18" name="Text 15"/>
-          <p:cNvSpPr txBox="1"/>
-          <p:nvPr/>
-        </p:nvSpPr>
-        <p:spPr>
-          <a:xfrm>
-            <a:off x="11192256" y="6035040"/>
-            <a:ext cx="2697480" cy="1097280"/>
+          <p:cNvPr id="121" name="Text 118"/>
+          <p:cNvSpPr txBox="1"/>
+          <p:nvPr/>
+        </p:nvSpPr>
+        <p:spPr>
+          <a:xfrm>
+            <a:off x="16916400" y="24094440"/>
+            <a:ext cx="3474720" cy="1426464"/>
           </a:xfrm>
           <a:prstGeom prst="rect">
             <a:avLst/>
@@ -1670,7 +5098,7 @@
               <a:buNone/>
             </a:pPr>
             <a:r>
-              <a:rPr lang="en-US" sz="5400" b="1" dirty="0">
+              <a:rPr lang="en-US" sz="4800" b="1" dirty="0">
                 <a:solidFill>
                   <a:srgbClr val="2A78D6"/>
                 </a:solidFill>
@@ -1678,22 +5106,22 @@
                 <a:ea typeface="Cambria" pitchFamily="34" charset="-122"/>
                 <a:cs typeface="Cambria" pitchFamily="34" charset="-120"/>
               </a:rPr>
-              <a:t>34%</a:t>
-            </a:r>
-            <a:endParaRPr lang="en-US" sz="5400" dirty="0"/>
-          </a:p>
-        </p:txBody>
-      </p:sp>
-      <p:sp>
-        <p:nvSpPr>
-          <p:cNvPr id="19" name="Text 16"/>
-          <p:cNvSpPr txBox="1"/>
-          <p:nvPr/>
-        </p:nvSpPr>
-        <p:spPr>
-          <a:xfrm>
-            <a:off x="11192256" y="7178040"/>
-            <a:ext cx="2697480" cy="868680"/>
+              <a:t>44→62%</a:t>
+            </a:r>
+            <a:endParaRPr lang="en-US" sz="4800" dirty="0"/>
+          </a:p>
+        </p:txBody>
+      </p:sp>
+      <p:sp>
+        <p:nvSpPr>
+          <p:cNvPr id="122" name="Text 119"/>
+          <p:cNvSpPr txBox="1"/>
+          <p:nvPr/>
+        </p:nvSpPr>
+        <p:spPr>
+          <a:xfrm>
+            <a:off x="16962120" y="25447752"/>
+            <a:ext cx="3383280" cy="1152144"/>
           </a:xfrm>
           <a:prstGeom prst="rect">
             <a:avLst/>
@@ -1709,7 +5137,7 @@
               <a:buNone/>
             </a:pPr>
             <a:r>
-              <a:rPr lang="en-US" sz="1900" dirty="0">
+              <a:rPr lang="en-US" sz="2100" dirty="0">
                 <a:solidFill>
                   <a:srgbClr val="52514E"/>
                 </a:solidFill>
@@ -1717,88 +5145,127 @@
                 <a:ea typeface="Calibri" pitchFamily="34" charset="-122"/>
                 <a:cs typeface="Calibri" pitchFamily="34" charset="-120"/>
               </a:rPr>
-              <a:t>IA-2 %Good, 6 hard inst. (IA-1 6%, paper 15%)</a:t>
-            </a:r>
-            <a:endParaRPr lang="en-US" sz="1900" dirty="0"/>
-          </a:p>
-        </p:txBody>
-      </p:sp>
-      <p:sp>
-        <p:nvSpPr>
-          <p:cNvPr id="20" name="Shape 17"/>
-          <p:cNvSpPr/>
-          <p:nvPr/>
-        </p:nvSpPr>
-        <p:spPr>
-          <a:xfrm>
-            <a:off x="14324076" y="5852160"/>
-            <a:ext cx="2971800" cy="2286000"/>
+              <a:t>Good runs (all 11)</a:t>
+            </a:r>
+            <a:endParaRPr lang="en-US" sz="2100" dirty="0"/>
+          </a:p>
+        </p:txBody>
+      </p:sp>
+      <p:sp>
+        <p:nvSpPr>
+          <p:cNvPr id="123" name="Shape 120"/>
+          <p:cNvSpPr/>
+          <p:nvPr/>
+        </p:nvSpPr>
+        <p:spPr>
+          <a:xfrm>
+            <a:off x="8595360" y="26883360"/>
+            <a:ext cx="11978640" cy="1325880"/>
           </a:xfrm>
           <a:prstGeom prst="roundRect">
             <a:avLst>
-              <a:gd name="adj" fmla="val 8000"/>
+              <a:gd name="adj" fmla="val 17241"/>
             </a:avLst>
           </a:prstGeom>
           <a:solidFill>
-            <a:srgbClr val="EEF3F8"/>
+            <a:srgbClr val="FFFFFF"/>
+          </a:solidFill>
+          <a:ln w="25400">
+            <a:solidFill>
+              <a:srgbClr val="C9C8C2"/>
+            </a:solidFill>
+            <a:prstDash val="solid"/>
+          </a:ln>
+        </p:spPr>
+      </p:sp>
+      <p:sp>
+        <p:nvSpPr>
+          <p:cNvPr id="124" name="Text 121"/>
+          <p:cNvSpPr txBox="1"/>
+          <p:nvPr/>
+        </p:nvSpPr>
+        <p:spPr>
+          <a:xfrm>
+            <a:off x="8778240" y="26974800"/>
+            <a:ext cx="11612880" cy="1188720"/>
+          </a:xfrm>
+          <a:prstGeom prst="rect">
+            <a:avLst/>
+          </a:prstGeom>
+          <a:noFill/>
+          <a:ln/>
+        </p:spPr>
+        <p:txBody>
+          <a:bodyPr wrap="square" lIns="1270" tIns="1270" rIns="1270" bIns="1270" rtlCol="0" anchor="ctr"/>
+          <a:lstStyle/>
+          <a:p>
+            <a:pPr indent="0" marL="0">
+              <a:buNone/>
+            </a:pPr>
+            <a:r>
+              <a:rPr lang="en-US" sz="2100" b="1" dirty="0">
+                <a:solidFill>
+                  <a:srgbClr val="16324F"/>
+                </a:solidFill>
+                <a:latin typeface="Calibri" pitchFamily="34" charset="0"/>
+                <a:ea typeface="Calibri" pitchFamily="34" charset="-122"/>
+                <a:cs typeface="Calibri" pitchFamily="34" charset="-120"/>
+              </a:rPr>
+              <a:t>Biggest gains: af-2 2% → 68%, af-4 20% → 58% Good runs. </a:t>
+            </a:r>
+            <a:pPr indent="0" marL="0">
+              <a:buNone/>
+            </a:pPr>
+            <a:r>
+              <a:rPr lang="en-US" sz="2100" dirty="0">
+                <a:solidFill>
+                  <a:srgbClr val="52514E"/>
+                </a:solidFill>
+                <a:latin typeface="Calibri" pitchFamily="34" charset="0"/>
+                <a:ea typeface="Calibri" pitchFamily="34" charset="-122"/>
+                <a:cs typeface="Calibri" pitchFamily="34" charset="-120"/>
+              </a:rPr>
+              <a:t>Limits: af-6-f unsolved by both; easy instances a bit slower.</a:t>
+            </a:r>
+            <a:endParaRPr lang="en-US" sz="2100" dirty="0"/>
+          </a:p>
+        </p:txBody>
+      </p:sp>
+      <p:sp>
+        <p:nvSpPr>
+          <p:cNvPr id="125" name="Shape 122"/>
+          <p:cNvSpPr/>
+          <p:nvPr/>
+        </p:nvSpPr>
+        <p:spPr>
+          <a:xfrm>
+            <a:off x="822960" y="29215080"/>
+            <a:ext cx="19751040" cy="36576"/>
+          </a:xfrm>
+          <a:prstGeom prst="rect">
+            <a:avLst/>
+          </a:prstGeom>
+          <a:solidFill>
+            <a:srgbClr val="C9C8C2"/>
           </a:solidFill>
           <a:ln w="12700">
             <a:solidFill>
-              <a:srgbClr val="EEF3F8"/>
-            </a:solidFill>
-            <a:prstDash val="solid"/>
-          </a:ln>
-        </p:spPr>
-      </p:sp>
-      <p:sp>
-        <p:nvSpPr>
-          <p:cNvPr id="21" name="Text 18"/>
-          <p:cNvSpPr txBox="1"/>
-          <p:nvPr/>
-        </p:nvSpPr>
-        <p:spPr>
-          <a:xfrm>
-            <a:off x="14461236" y="6035040"/>
-            <a:ext cx="2697480" cy="1097280"/>
-          </a:xfrm>
-          <a:prstGeom prst="rect">
-            <a:avLst/>
-          </a:prstGeom>
-          <a:noFill/>
-          <a:ln/>
-        </p:spPr>
-        <p:txBody>
-          <a:bodyPr wrap="square" lIns="1270" tIns="1270" rIns="1270" bIns="1270" rtlCol="0" anchor="ctr"/>
-          <a:lstStyle/>
-          <a:p>
-            <a:pPr algn="ctr" indent="0" marL="0">
-              <a:buNone/>
-            </a:pPr>
-            <a:r>
-              <a:rPr lang="en-US" sz="5400" b="1" dirty="0">
-                <a:solidFill>
-                  <a:srgbClr val="2A78D6"/>
-                </a:solidFill>
-                <a:latin typeface="Cambria" pitchFamily="34" charset="0"/>
-                <a:ea typeface="Cambria" pitchFamily="34" charset="-122"/>
-                <a:cs typeface="Cambria" pitchFamily="34" charset="-120"/>
-              </a:rPr>
-              <a:t>96%</a:t>
-            </a:r>
-            <a:endParaRPr lang="en-US" sz="5400" dirty="0"/>
-          </a:p>
-        </p:txBody>
-      </p:sp>
-      <p:sp>
-        <p:nvSpPr>
-          <p:cNvPr id="22" name="Text 19"/>
-          <p:cNvSpPr txBox="1"/>
-          <p:nvPr/>
-        </p:nvSpPr>
-        <p:spPr>
-          <a:xfrm>
-            <a:off x="14461236" y="7178040"/>
-            <a:ext cx="2697480" cy="868680"/>
+              <a:srgbClr val="C9C8C2"/>
+            </a:solidFill>
+            <a:prstDash val="solid"/>
+          </a:ln>
+        </p:spPr>
+      </p:sp>
+      <p:sp>
+        <p:nvSpPr>
+          <p:cNvPr id="126" name="Text 123"/>
+          <p:cNvSpPr txBox="1"/>
+          <p:nvPr/>
+        </p:nvSpPr>
+        <p:spPr>
+          <a:xfrm>
+            <a:off x="822960" y="28392120"/>
+            <a:ext cx="19751040" cy="777240"/>
           </a:xfrm>
           <a:prstGeom prst="rect">
             <a:avLst/>
@@ -1810,11 +5277,64 @@
           <a:bodyPr wrap="square" lIns="1270" tIns="1270" rIns="1270" bIns="1270" rtlCol="0" anchor="t"/>
           <a:lstStyle/>
           <a:p>
-            <a:pPr algn="ctr" indent="0" marL="0">
-              <a:buNone/>
-            </a:pPr>
-            <a:r>
-              <a:rPr lang="en-US" sz="1900" dirty="0">
+            <a:pPr indent="0" marL="0">
+              <a:buNone/>
+            </a:pPr>
+            <a:r>
+              <a:rPr lang="en-US" sz="2400" b="1" dirty="0">
+                <a:solidFill>
+                  <a:srgbClr val="16324F"/>
+                </a:solidFill>
+                <a:latin typeface="Calibri" pitchFamily="34" charset="0"/>
+                <a:ea typeface="Calibri" pitchFamily="34" charset="-122"/>
+                <a:cs typeface="Calibri" pitchFamily="34" charset="-120"/>
+              </a:rPr>
+              <a:t>Take-away: </a:t>
+            </a:r>
+            <a:pPr indent="0" marL="0">
+              <a:buNone/>
+            </a:pPr>
+            <a:r>
+              <a:rPr lang="en-US" sz="2400" dirty="0">
+                <a:solidFill>
+                  <a:srgbClr val="1B2433"/>
+                </a:solidFill>
+                <a:latin typeface="Calibri" pitchFamily="34" charset="0"/>
+                <a:ea typeface="Calibri" pitchFamily="34" charset="-122"/>
+                <a:cs typeface="Calibri" pitchFamily="34" charset="-120"/>
+              </a:rPr>
+              <a:t>using simple LPs to start smart and to learn from the best answer makes SLP find good feed recipes about 5× more often on hard problems.</a:t>
+            </a:r>
+            <a:endParaRPr lang="en-US" sz="2400" dirty="0"/>
+          </a:p>
+        </p:txBody>
+      </p:sp>
+      <p:sp>
+        <p:nvSpPr>
+          <p:cNvPr id="127" name="Text 124"/>
+          <p:cNvSpPr txBox="1"/>
+          <p:nvPr/>
+        </p:nvSpPr>
+        <p:spPr>
+          <a:xfrm>
+            <a:off x="822960" y="29306520"/>
+            <a:ext cx="19751040" cy="822960"/>
+          </a:xfrm>
+          <a:prstGeom prst="rect">
+            <a:avLst/>
+          </a:prstGeom>
+          <a:noFill/>
+          <a:ln/>
+        </p:spPr>
+        <p:txBody>
+          <a:bodyPr wrap="square" lIns="1270" tIns="1270" rIns="1270" bIns="1270" rtlCol="0" anchor="t"/>
+          <a:lstStyle/>
+          <a:p>
+            <a:pPr indent="0" marL="0">
+              <a:buNone/>
+            </a:pPr>
+            <a:r>
+              <a:rPr lang="en-US" sz="1600" dirty="0">
                 <a:solidFill>
                   <a:srgbClr val="52514E"/>
                 </a:solidFill>
@@ -1822,432 +5342,7 @@
                 <a:ea typeface="Calibri" pitchFamily="34" charset="-122"/>
                 <a:cs typeface="Calibri" pitchFamily="34" charset="-120"/>
               </a:rPr>
-              <a:t>IA-2 mean %Feas (IA-1 88%)</a:t>
-            </a:r>
-            <a:endParaRPr lang="en-US" sz="1900" dirty="0"/>
-          </a:p>
-        </p:txBody>
-      </p:sp>
-      <p:sp>
-        <p:nvSpPr>
-          <p:cNvPr id="23" name="Shape 20"/>
-          <p:cNvSpPr/>
-          <p:nvPr/>
-        </p:nvSpPr>
-        <p:spPr>
-          <a:xfrm>
-            <a:off x="17593056" y="5852160"/>
-            <a:ext cx="2971800" cy="2286000"/>
-          </a:xfrm>
-          <a:prstGeom prst="roundRect">
-            <a:avLst>
-              <a:gd name="adj" fmla="val 8000"/>
-            </a:avLst>
-          </a:prstGeom>
-          <a:solidFill>
-            <a:srgbClr val="EEF3F8"/>
-          </a:solidFill>
-          <a:ln w="12700">
-            <a:solidFill>
-              <a:srgbClr val="EEF3F8"/>
-            </a:solidFill>
-            <a:prstDash val="solid"/>
-          </a:ln>
-        </p:spPr>
-      </p:sp>
-      <p:sp>
-        <p:nvSpPr>
-          <p:cNvPr id="24" name="Text 21"/>
-          <p:cNvSpPr txBox="1"/>
-          <p:nvPr/>
-        </p:nvSpPr>
-        <p:spPr>
-          <a:xfrm>
-            <a:off x="17730216" y="6035040"/>
-            <a:ext cx="2697480" cy="1097280"/>
-          </a:xfrm>
-          <a:prstGeom prst="rect">
-            <a:avLst/>
-          </a:prstGeom>
-          <a:noFill/>
-          <a:ln/>
-        </p:spPr>
-        <p:txBody>
-          <a:bodyPr wrap="square" lIns="1270" tIns="1270" rIns="1270" bIns="1270" rtlCol="0" anchor="ctr"/>
-          <a:lstStyle/>
-          <a:p>
-            <a:pPr algn="ctr" indent="0" marL="0">
-              <a:buNone/>
-            </a:pPr>
-            <a:r>
-              <a:rPr lang="en-US" sz="5400" b="1" dirty="0">
-                <a:solidFill>
-                  <a:srgbClr val="2A78D6"/>
-                </a:solidFill>
-                <a:latin typeface="Cambria" pitchFamily="34" charset="0"/>
-                <a:ea typeface="Cambria" pitchFamily="34" charset="-122"/>
-                <a:cs typeface="Cambria" pitchFamily="34" charset="-120"/>
-              </a:rPr>
-              <a:t>5.0×</a:t>
-            </a:r>
-            <a:endParaRPr lang="en-US" sz="5400" dirty="0"/>
-          </a:p>
-        </p:txBody>
-      </p:sp>
-      <p:sp>
-        <p:nvSpPr>
-          <p:cNvPr id="25" name="Text 22"/>
-          <p:cNvSpPr txBox="1"/>
-          <p:nvPr/>
-        </p:nvSpPr>
-        <p:spPr>
-          <a:xfrm>
-            <a:off x="17730216" y="7178040"/>
-            <a:ext cx="2697480" cy="868680"/>
-          </a:xfrm>
-          <a:prstGeom prst="rect">
-            <a:avLst/>
-          </a:prstGeom>
-          <a:noFill/>
-          <a:ln/>
-        </p:spPr>
-        <p:txBody>
-          <a:bodyPr wrap="square" lIns="1270" tIns="1270" rIns="1270" bIns="1270" rtlCol="0" anchor="t"/>
-          <a:lstStyle/>
-          <a:p>
-            <a:pPr algn="ctr" indent="0" marL="0">
-              <a:buNone/>
-            </a:pPr>
-            <a:r>
-              <a:rPr lang="en-US" sz="1900" dirty="0">
-                <a:solidFill>
-                  <a:srgbClr val="52514E"/>
-                </a:solidFill>
-                <a:latin typeface="Calibri" pitchFamily="34" charset="0"/>
-                <a:ea typeface="Calibri" pitchFamily="34" charset="-122"/>
-                <a:cs typeface="Calibri" pitchFamily="34" charset="-120"/>
-              </a:rPr>
-              <a:t>IA-2 vs IA-1: shorter time to a Good solution</a:t>
-            </a:r>
-            <a:endParaRPr lang="en-US" sz="1900" dirty="0"/>
-          </a:p>
-        </p:txBody>
-      </p:sp>
-      <p:pic>
-        <p:nvPicPr>
-          <p:cNvPr id="26" name="Image 1" descr="fig_pct_good.png">    </p:cNvPr>
-          <p:cNvPicPr>
-            <a:picLocks noChangeAspect="1"/>
-          </p:cNvPicPr>
-          <p:nvPr/>
-        </p:nvPicPr>
-        <p:blipFill>
-          <a:blip r:embed="rId2"/>
-          <a:stretch>
-            <a:fillRect/>
-          </a:stretch>
-        </p:blipFill>
-        <p:spPr>
-          <a:xfrm>
-            <a:off x="11055096" y="8412480"/>
-            <a:ext cx="9509760" cy="3708806"/>
-          </a:xfrm>
-          <a:prstGeom prst="rect">
-            <a:avLst/>
-          </a:prstGeom>
-        </p:spPr>
-      </p:pic>
-      <p:pic>
-        <p:nvPicPr>
-          <p:cNvPr id="27" name="Image 2" descr="fig_convergence.png">    </p:cNvPr>
-          <p:cNvPicPr>
-            <a:picLocks noChangeAspect="1"/>
-          </p:cNvPicPr>
-          <p:nvPr/>
-        </p:nvPicPr>
-        <p:blipFill>
-          <a:blip r:embed="rId3"/>
-          <a:stretch>
-            <a:fillRect/>
-          </a:stretch>
-        </p:blipFill>
-        <p:spPr>
-          <a:xfrm>
-            <a:off x="11055096" y="12304166"/>
-            <a:ext cx="9509760" cy="5571375"/>
-          </a:xfrm>
-          <a:prstGeom prst="rect">
-            <a:avLst/>
-          </a:prstGeom>
-        </p:spPr>
-      </p:pic>
-      <p:sp>
-        <p:nvSpPr>
-          <p:cNvPr id="28" name="Shape 23"/>
-          <p:cNvSpPr/>
-          <p:nvPr/>
-        </p:nvSpPr>
-        <p:spPr>
-          <a:xfrm>
-            <a:off x="11055096" y="18241301"/>
-            <a:ext cx="9509760" cy="3017520"/>
-          </a:xfrm>
-          <a:prstGeom prst="roundRect">
-            <a:avLst>
-              <a:gd name="adj" fmla="val 6061"/>
-            </a:avLst>
-          </a:prstGeom>
-          <a:solidFill>
-            <a:srgbClr val="EEF3F8"/>
-          </a:solidFill>
-          <a:ln w="12700">
-            <a:solidFill>
-              <a:srgbClr val="EEF3F8"/>
-            </a:solidFill>
-            <a:prstDash val="solid"/>
-          </a:ln>
-        </p:spPr>
-      </p:sp>
-      <p:sp>
-        <p:nvSpPr>
-          <p:cNvPr id="29" name="Text 24"/>
-          <p:cNvSpPr txBox="1"/>
-          <p:nvPr/>
-        </p:nvSpPr>
-        <p:spPr>
-          <a:xfrm>
-            <a:off x="11329416" y="18378461"/>
-            <a:ext cx="8961120" cy="2743200"/>
-          </a:xfrm>
-          <a:prstGeom prst="rect">
-            <a:avLst/>
-          </a:prstGeom>
-          <a:noFill/>
-          <a:ln/>
-        </p:spPr>
-        <p:txBody>
-          <a:bodyPr wrap="square" lIns="1270" tIns="1270" rIns="1270" bIns="1270" rtlCol="0" anchor="t"/>
-          <a:lstStyle/>
-          <a:p>
-            <a:pPr indent="0" marL="0">
-              <a:spcAft>
-                <a:spcPts val="600"/>
-              </a:spcAft>
-              <a:buNone/>
-            </a:pPr>
-            <a:r>
-              <a:rPr lang="en-US" sz="2200" b="1" dirty="0">
-                <a:solidFill>
-                  <a:srgbClr val="1B2433"/>
-                </a:solidFill>
-                <a:latin typeface="Calibri" pitchFamily="34" charset="0"/>
-                <a:ea typeface="Calibri" pitchFamily="34" charset="-122"/>
-                <a:cs typeface="Calibri" pitchFamily="34" charset="-120"/>
-              </a:rPr>
-              <a:t>Highlights</a:t>
-            </a:r>
-            <a:endParaRPr lang="en-US" sz="2200" dirty="0"/>
-          </a:p>
-          <a:p>
-            <a:pPr marL="342900" indent="-342900">
-              <a:spcAft>
-                <a:spcPts val="600"/>
-              </a:spcAft>
-              <a:buSzPct val="100000"/>
-              <a:buChar char="•"/>
-            </a:pPr>
-            <a:r>
-              <a:rPr lang="en-US" sz="2200" dirty="0">
-                <a:solidFill>
-                  <a:srgbClr val="1B2433"/>
-                </a:solidFill>
-                <a:latin typeface="Calibri" pitchFamily="34" charset="0"/>
-                <a:ea typeface="Calibri" pitchFamily="34" charset="-122"/>
-                <a:cs typeface="Calibri" pitchFamily="34" charset="-120"/>
-              </a:rPr>
-              <a:t>IA-2 %Good: af-2 68% (paper 19.4%), af-4 58% (19.8%), af-3 32% (20%), af-6-fs 27% (5.2%); af-7 18% (20.4%) and af-6-f 0% (4.0%) stay below the paper</a:t>
-            </a:r>
-            <a:endParaRPr lang="en-US" sz="2200" dirty="0"/>
-          </a:p>
-          <a:p>
-            <a:pPr marL="342900" indent="-342900">
-              <a:spcAft>
-                <a:spcPts val="600"/>
-              </a:spcAft>
-              <a:buSzPct val="100000"/>
-              <a:buChar char="•"/>
-            </a:pPr>
-            <a:r>
-              <a:rPr lang="en-US" sz="2200" dirty="0">
-                <a:solidFill>
-                  <a:srgbClr val="1B2433"/>
-                </a:solidFill>
-                <a:latin typeface="Calibri" pitchFamily="34" charset="0"/>
-                <a:ea typeface="Calibri" pitchFamily="34" charset="-122"/>
-                <a:cs typeface="Calibri" pitchFamily="34" charset="-120"/>
-              </a:rPr>
-              <a:t>IA-2 vs IA-1 significant: Fisher p &lt; 0.01 on 5 instances, Mann–Whitney on 9 of 11</a:t>
-            </a:r>
-            <a:endParaRPr lang="en-US" sz="2200" dirty="0"/>
-          </a:p>
-          <a:p>
-            <a:pPr marL="342900" indent="-342900">
-              <a:spcAft>
-                <a:spcPts val="600"/>
-              </a:spcAft>
-              <a:buSzPct val="100000"/>
-              <a:buChar char="•"/>
-            </a:pPr>
-            <a:r>
-              <a:rPr lang="en-US" sz="2200" dirty="0">
-                <a:solidFill>
-                  <a:srgbClr val="1B2433"/>
-                </a:solidFill>
-                <a:latin typeface="Calibri" pitchFamily="34" charset="0"/>
-                <a:ea typeface="Calibri" pitchFamily="34" charset="-122"/>
-                <a:cs typeface="Calibri" pitchFamily="34" charset="-120"/>
-              </a:rPr>
-              <a:t>Diet LP bound on af-1 = Baron's bound (295.93), in milliseconds; easy instances ~2× slower</a:t>
-            </a:r>
-            <a:endParaRPr lang="en-US" sz="2200" dirty="0"/>
-          </a:p>
-        </p:txBody>
-      </p:sp>
-      <p:sp>
-        <p:nvSpPr>
-          <p:cNvPr id="30" name="Text 25"/>
-          <p:cNvSpPr txBox="1"/>
-          <p:nvPr/>
-        </p:nvSpPr>
-        <p:spPr>
-          <a:xfrm>
-            <a:off x="11055096" y="21533141"/>
-            <a:ext cx="9509760" cy="822960"/>
-          </a:xfrm>
-          <a:prstGeom prst="rect">
-            <a:avLst/>
-          </a:prstGeom>
-          <a:noFill/>
-          <a:ln/>
-        </p:spPr>
-        <p:txBody>
-          <a:bodyPr wrap="square" lIns="1270" tIns="1270" rIns="1270" bIns="1270" rtlCol="0" anchor="t"/>
-          <a:lstStyle/>
-          <a:p>
-            <a:pPr indent="0" marL="0">
-              <a:buNone/>
-            </a:pPr>
-            <a:r>
-              <a:rPr lang="en-US" sz="4000" b="1" dirty="0">
-                <a:solidFill>
-                  <a:srgbClr val="16324F"/>
-                </a:solidFill>
-                <a:latin typeface="Cambria" pitchFamily="34" charset="0"/>
-                <a:ea typeface="Cambria" pitchFamily="34" charset="-122"/>
-                <a:cs typeface="Cambria" pitchFamily="34" charset="-120"/>
-              </a:rPr>
-              <a:t>6. Conclusion</a:t>
-            </a:r>
-            <a:endParaRPr lang="en-US" sz="4000" dirty="0"/>
-          </a:p>
-        </p:txBody>
-      </p:sp>
-      <p:sp>
-        <p:nvSpPr>
-          <p:cNvPr id="31" name="Text 26"/>
-          <p:cNvSpPr txBox="1"/>
-          <p:nvPr/>
-        </p:nvSpPr>
-        <p:spPr>
-          <a:xfrm>
-            <a:off x="11055096" y="22401821"/>
-            <a:ext cx="9509760" cy="2377440"/>
-          </a:xfrm>
-          <a:prstGeom prst="rect">
-            <a:avLst/>
-          </a:prstGeom>
-          <a:noFill/>
-          <a:ln/>
-        </p:spPr>
-        <p:txBody>
-          <a:bodyPr wrap="square" lIns="1270" tIns="1270" rIns="1270" bIns="1270" rtlCol="0" anchor="t"/>
-          <a:lstStyle/>
-          <a:p>
-            <a:pPr indent="0" marL="0">
-              <a:buNone/>
-            </a:pPr>
-            <a:r>
-              <a:rPr lang="en-US" sz="2300" dirty="0">
-                <a:solidFill>
-                  <a:srgbClr val="1B2433"/>
-                </a:solidFill>
-                <a:latin typeface="Calibri" pitchFamily="34" charset="0"/>
-                <a:ea typeface="Calibri" pitchFamily="34" charset="-122"/>
-                <a:cs typeface="Calibri" pitchFamily="34" charset="-120"/>
-              </a:rPr>
-              <a:t>Keeping our IA-1 model and SLP solver unchanged but making restarts structure-aware (LP repair, LP polish, regret-guided re-seeding with SLP probes) turns random-multistart SLP into a reliable method on the hard feed-mill instances. Next: more seeds, adaptive moves, parallel probes, stronger bounds.</a:t>
-            </a:r>
-            <a:endParaRPr lang="en-US" sz="2300" dirty="0"/>
-          </a:p>
-        </p:txBody>
-      </p:sp>
-      <p:sp>
-        <p:nvSpPr>
-          <p:cNvPr id="32" name="Shape 27"/>
-          <p:cNvSpPr/>
-          <p:nvPr/>
-        </p:nvSpPr>
-        <p:spPr>
-          <a:xfrm>
-            <a:off x="822960" y="29032200"/>
-            <a:ext cx="19751040" cy="0"/>
-          </a:xfrm>
-          <a:prstGeom prst="line">
-            <a:avLst/>
-          </a:prstGeom>
-          <a:noFill/>
-          <a:ln w="12700">
-            <a:solidFill>
-              <a:srgbClr val="C9C8C2"/>
-            </a:solidFill>
-            <a:prstDash val="solid"/>
-          </a:ln>
-        </p:spPr>
-      </p:sp>
-      <p:sp>
-        <p:nvSpPr>
-          <p:cNvPr id="33" name="Text 28"/>
-          <p:cNvSpPr txBox="1"/>
-          <p:nvPr/>
-        </p:nvSpPr>
-        <p:spPr>
-          <a:xfrm>
-            <a:off x="822960" y="29123640"/>
-            <a:ext cx="19751040" cy="822960"/>
-          </a:xfrm>
-          <a:prstGeom prst="rect">
-            <a:avLst/>
-          </a:prstGeom>
-          <a:noFill/>
-          <a:ln/>
-        </p:spPr>
-        <p:txBody>
-          <a:bodyPr wrap="square" lIns="1270" tIns="1270" rIns="1270" bIns="1270" rtlCol="0" anchor="t"/>
-          <a:lstStyle/>
-          <a:p>
-            <a:pPr indent="0" marL="0">
-              <a:buNone/>
-            </a:pPr>
-            <a:r>
-              <a:rPr lang="en-US" sz="1600" dirty="0">
-                <a:solidFill>
-                  <a:srgbClr val="52514E"/>
-                </a:solidFill>
-                <a:latin typeface="Calibri" pitchFamily="34" charset="0"/>
-                <a:ea typeface="Calibri" pitchFamily="34" charset="-122"/>
-                <a:cs typeface="Calibri" pitchFamily="34" charset="-120"/>
-              </a:rPr>
-              <a:t>[1] A. Grothey, K. McKinnon, On the effectiveness of sequential linear programming for the pooling problem, Ann. Oper. Res. 322 (2023) 691–711.   [2] C. Audet et al., Pooling problem: alternate formulations and solution methods, Manag. Sci. 50 (2004).   [3] Group OPT-09, IA-1 report (2026). Data: Grothey &amp; McKinnon (2020). Code: Python + SciPy/HiGHS.</a:t>
+              <a:t>[1] A. Grothey, K. McKinnon, On the effectiveness of sequential linear programming for the pooling problem, Ann. Oper. Res. 322 (2023) 691–711.  [2] Group OPT-09, IA-1 report (2026).  Code + Colab demo: github.com/razzantambe/OPT-09-IA2-Pooling-SLP</a:t>
             </a:r>
             <a:endParaRPr lang="en-US" sz="1600" dirty="0"/>
           </a:p>
